--- a/slides/pptx/week12.pptx
+++ b/slides/pptx/week12.pptx
@@ -2014,7 +2014,7 @@
     <p:bg>
       <p:bgPr>
         <a:solidFill>
-          <a:srgbClr val="0E1726"/>
+          <a:srgbClr val="FFFFFF"/>
         </a:solidFill>
       </p:bgPr>
     </p:bg>
@@ -2032,38 +2032,9 @@
           <a:chExt cx="0" cy="0"/>
         </a:xfrm>
       </p:grpSpPr>
-      <p:sp>
-        <p:nvSpPr>
-          <p:cNvPr id="2" name="Shape 0"/>
-          <p:cNvSpPr/>
-          <p:nvPr/>
-        </p:nvSpPr>
-        <p:spPr>
-          <a:xfrm>
-            <a:off x="603504" y="411480"/>
-            <a:ext cx="1874520" cy="932688"/>
-          </a:xfrm>
-          <a:prstGeom prst="roundRect">
-            <a:avLst>
-              <a:gd name="adj" fmla="val 7843"/>
-            </a:avLst>
-          </a:prstGeom>
-          <a:solidFill>
-            <a:srgbClr val="FFFFFF"/>
-          </a:solidFill>
-          <a:ln/>
-          <a:effectLst>
-            <a:outerShdw sx="100000" sy="100000" kx="0" ky="0" algn="bl" rotWithShape="0" blurRad="101600" dist="38100" dir="5400000">
-              <a:srgbClr val="000000">
-                <a:alpha val="35000"/>
-              </a:srgbClr>
-            </a:outerShdw>
-          </a:effectLst>
-        </p:spPr>
-      </p:sp>
       <p:pic>
         <p:nvPicPr>
-          <p:cNvPr id="3" name="Image 0" descr="/Users/pop7/Library/CloudStorage/OneDrive-MonsterConnectCo.,Ltd/Lecture/KOSEN69 - software-security/slides/pptx/assets/logo-small.png">    </p:cNvPr>
+          <p:cNvPr id="2" name="Image 0" descr="/Users/pop7/Library/CloudStorage/OneDrive-MonsterConnectCo.,Ltd/Lecture/KOSEN69 - software-security/slides/pptx/assets/logo-small.png">    </p:cNvPr>
           <p:cNvPicPr>
             <a:picLocks noChangeAspect="1"/>
           </p:cNvPicPr>
@@ -2077,8 +2048,8 @@
         </p:blipFill>
         <p:spPr>
           <a:xfrm>
-            <a:off x="758952" y="566928"/>
-            <a:ext cx="1563624" cy="621792"/>
+            <a:off x="640080" y="502920"/>
+            <a:ext cx="1691640" cy="676656"/>
           </a:xfrm>
           <a:prstGeom prst="rect">
             <a:avLst/>
@@ -2087,7 +2058,7 @@
       </p:pic>
       <p:sp>
         <p:nvSpPr>
-          <p:cNvPr id="4" name="Text 1"/>
+          <p:cNvPr id="3" name="Text 0"/>
           <p:cNvSpPr/>
           <p:nvPr/>
         </p:nvSpPr>
@@ -2126,7 +2097,7 @@
       </p:sp>
       <p:sp>
         <p:nvSpPr>
-          <p:cNvPr id="5" name="Text 2"/>
+          <p:cNvPr id="4" name="Text 1"/>
           <p:cNvSpPr/>
           <p:nvPr/>
         </p:nvSpPr>
@@ -2154,7 +2125,7 @@
             <a:r>
               <a:rPr lang="en-US" sz="4000" b="1" dirty="0">
                 <a:solidFill>
-                  <a:srgbClr val="E6EDF3"/>
+                  <a:srgbClr val="1F2937"/>
                 </a:solidFill>
                 <a:latin typeface="Arial" pitchFamily="34" charset="0"/>
                 <a:ea typeface="Arial" pitchFamily="34" charset="-122"/>
@@ -2168,7 +2139,7 @@
       </p:sp>
       <p:sp>
         <p:nvSpPr>
-          <p:cNvPr id="6" name="Text 3"/>
+          <p:cNvPr id="5" name="Text 2"/>
           <p:cNvSpPr/>
           <p:nvPr/>
         </p:nvSpPr>
@@ -2193,7 +2164,7 @@
             <a:r>
               <a:rPr lang="en-US" sz="1400" dirty="0">
                 <a:solidFill>
-                  <a:srgbClr val="94A3B8"/>
+                  <a:srgbClr val="64748B"/>
                 </a:solidFill>
                 <a:latin typeface="Calibri" pitchFamily="34" charset="0"/>
                 <a:ea typeface="Calibri" pitchFamily="34" charset="-122"/>
@@ -2219,7 +2190,7 @@
     <p:bg>
       <p:bgPr>
         <a:solidFill>
-          <a:srgbClr val="0E1726"/>
+          <a:srgbClr val="FFFFFF"/>
         </a:solidFill>
       </p:bgPr>
     </p:bg>
@@ -2256,9 +2227,9 @@
           </a:solidFill>
           <a:ln/>
           <a:effectLst>
-            <a:outerShdw sx="100000" sy="100000" kx="0" ky="0" algn="bl" rotWithShape="0" blurRad="101600" dist="38100" dir="5400000">
+            <a:outerShdw sx="100000" sy="100000" kx="0" ky="0" algn="bl" rotWithShape="0" blurRad="76200" dist="25400" dir="5400000">
               <a:srgbClr val="000000">
-                <a:alpha val="35000"/>
+                <a:alpha val="12000"/>
               </a:srgbClr>
             </a:outerShdw>
           </a:effectLst>
@@ -2315,7 +2286,7 @@
             <a:r>
               <a:rPr lang="en-US" sz="2600" b="1" dirty="0">
                 <a:solidFill>
-                  <a:srgbClr val="E6EDF3"/>
+                  <a:srgbClr val="1F2937"/>
                 </a:solidFill>
                 <a:latin typeface="Arial" pitchFamily="34" charset="0"/>
                 <a:ea typeface="Arial" pitchFamily="34" charset="-122"/>
@@ -2344,13 +2315,13 @@
             </a:avLst>
           </a:prstGeom>
           <a:solidFill>
-            <a:srgbClr val="18243A"/>
+            <a:srgbClr val="F1F5F9"/>
           </a:solidFill>
           <a:ln/>
           <a:effectLst>
-            <a:outerShdw sx="100000" sy="100000" kx="0" ky="0" algn="bl" rotWithShape="0" blurRad="101600" dist="38100" dir="5400000">
+            <a:outerShdw sx="100000" sy="100000" kx="0" ky="0" algn="bl" rotWithShape="0" blurRad="76200" dist="25400" dir="5400000">
               <a:srgbClr val="000000">
-                <a:alpha val="35000"/>
+                <a:alpha val="12000"/>
               </a:srgbClr>
             </a:outerShdw>
           </a:effectLst>
@@ -2387,7 +2358,7 @@
             <a:r>
               <a:rPr lang="en-US" sz="1400" dirty="0">
                 <a:solidFill>
-                  <a:srgbClr val="E6EDF3"/>
+                  <a:srgbClr val="1F2937"/>
                 </a:solidFill>
                 <a:latin typeface="Calibri" pitchFamily="34" charset="0"/>
                 <a:ea typeface="Calibri" pitchFamily="34" charset="-122"/>
@@ -2408,7 +2379,7 @@
             <a:r>
               <a:rPr lang="en-US" sz="1400" dirty="0">
                 <a:solidFill>
-                  <a:srgbClr val="E6EDF3"/>
+                  <a:srgbClr val="1F2937"/>
                 </a:solidFill>
                 <a:latin typeface="Calibri" pitchFamily="34" charset="0"/>
                 <a:ea typeface="Calibri" pitchFamily="34" charset="-122"/>
@@ -2429,7 +2400,7 @@
             <a:r>
               <a:rPr lang="en-US" sz="1400" dirty="0">
                 <a:solidFill>
-                  <a:srgbClr val="E6EDF3"/>
+                  <a:srgbClr val="1F2937"/>
                 </a:solidFill>
                 <a:latin typeface="Calibri" pitchFamily="34" charset="0"/>
                 <a:ea typeface="Calibri" pitchFamily="34" charset="-122"/>
@@ -2450,7 +2421,7 @@
             <a:r>
               <a:rPr lang="en-US" sz="1400" dirty="0">
                 <a:solidFill>
-                  <a:srgbClr val="E6EDF3"/>
+                  <a:srgbClr val="1F2937"/>
                 </a:solidFill>
                 <a:latin typeface="Calibri" pitchFamily="34" charset="0"/>
                 <a:ea typeface="Calibri" pitchFamily="34" charset="-122"/>
@@ -2471,7 +2442,7 @@
             <a:r>
               <a:rPr lang="en-US" sz="1400" dirty="0">
                 <a:solidFill>
-                  <a:srgbClr val="E6EDF3"/>
+                  <a:srgbClr val="1F2937"/>
                 </a:solidFill>
                 <a:latin typeface="Calibri" pitchFamily="34" charset="0"/>
                 <a:ea typeface="Calibri" pitchFamily="34" charset="-122"/>
@@ -2510,7 +2481,7 @@
             <a:r>
               <a:rPr lang="en-US" sz="900" dirty="0">
                 <a:solidFill>
-                  <a:srgbClr val="94A3B8"/>
+                  <a:srgbClr val="64748B"/>
                 </a:solidFill>
                 <a:latin typeface="Calibri" pitchFamily="34" charset="0"/>
                 <a:ea typeface="Calibri" pitchFamily="34" charset="-122"/>
@@ -2522,38 +2493,9 @@
           </a:p>
         </p:txBody>
       </p:sp>
-      <p:sp>
-        <p:nvSpPr>
-          <p:cNvPr id="8" name="Shape 5"/>
-          <p:cNvSpPr/>
-          <p:nvPr/>
-        </p:nvSpPr>
-        <p:spPr>
-          <a:xfrm>
-            <a:off x="7772400" y="4590288"/>
-            <a:ext cx="969264" cy="475488"/>
-          </a:xfrm>
-          <a:prstGeom prst="roundRect">
-            <a:avLst>
-              <a:gd name="adj" fmla="val 11538"/>
-            </a:avLst>
-          </a:prstGeom>
-          <a:solidFill>
-            <a:srgbClr val="FFFFFF"/>
-          </a:solidFill>
-          <a:ln/>
-          <a:effectLst>
-            <a:outerShdw sx="100000" sy="100000" kx="0" ky="0" algn="bl" rotWithShape="0" blurRad="101600" dist="38100" dir="5400000">
-              <a:srgbClr val="000000">
-                <a:alpha val="35000"/>
-              </a:srgbClr>
-            </a:outerShdw>
-          </a:effectLst>
-        </p:spPr>
-      </p:sp>
       <p:pic>
         <p:nvPicPr>
-          <p:cNvPr id="9" name="Image 1" descr="/Users/pop7/Library/CloudStorage/OneDrive-MonsterConnectCo.,Ltd/Lecture/KOSEN69 - software-security/slides/pptx/assets/logo-small.png">    </p:cNvPr>
+          <p:cNvPr id="8" name="Image 1" descr="/Users/pop7/Library/CloudStorage/OneDrive-MonsterConnectCo.,Ltd/Lecture/KOSEN69 - software-security/slides/pptx/assets/logo-small.png">    </p:cNvPr>
           <p:cNvPicPr>
             <a:picLocks noChangeAspect="1"/>
           </p:cNvPicPr>
@@ -2567,7 +2509,7 @@
         </p:blipFill>
         <p:spPr>
           <a:xfrm>
-            <a:off x="7872984" y="4681728"/>
+            <a:off x="7882128" y="4700016"/>
             <a:ext cx="768096" cy="356616"/>
           </a:xfrm>
           <a:prstGeom prst="rect">
@@ -2589,7 +2531,7 @@
     <p:bg>
       <p:bgPr>
         <a:solidFill>
-          <a:srgbClr val="0E1726"/>
+          <a:srgbClr val="FFFFFF"/>
         </a:solidFill>
       </p:bgPr>
     </p:bg>
@@ -2626,9 +2568,9 @@
           </a:solidFill>
           <a:ln/>
           <a:effectLst>
-            <a:outerShdw sx="100000" sy="100000" kx="0" ky="0" algn="bl" rotWithShape="0" blurRad="101600" dist="38100" dir="5400000">
+            <a:outerShdw sx="100000" sy="100000" kx="0" ky="0" algn="bl" rotWithShape="0" blurRad="76200" dist="25400" dir="5400000">
               <a:srgbClr val="000000">
-                <a:alpha val="35000"/>
+                <a:alpha val="12000"/>
               </a:srgbClr>
             </a:outerShdw>
           </a:effectLst>
@@ -2685,7 +2627,7 @@
             <a:r>
               <a:rPr lang="en-US" sz="2600" b="1" dirty="0">
                 <a:solidFill>
-                  <a:srgbClr val="E6EDF3"/>
+                  <a:srgbClr val="1F2937"/>
                 </a:solidFill>
                 <a:latin typeface="Arial" pitchFamily="34" charset="0"/>
                 <a:ea typeface="Arial" pitchFamily="34" charset="-122"/>
@@ -2783,7 +2725,7 @@
             <a:r>
               <a:rPr lang="en-US" sz="1350" dirty="0">
                 <a:solidFill>
-                  <a:srgbClr val="E6EDF3"/>
+                  <a:srgbClr val="1F2937"/>
                 </a:solidFill>
                 <a:latin typeface="Calibri" pitchFamily="34" charset="0"/>
                 <a:ea typeface="Calibri" pitchFamily="34" charset="-122"/>
@@ -2881,7 +2823,7 @@
             <a:r>
               <a:rPr lang="en-US" sz="1350" dirty="0">
                 <a:solidFill>
-                  <a:srgbClr val="E6EDF3"/>
+                  <a:srgbClr val="1F2937"/>
                 </a:solidFill>
                 <a:latin typeface="Calibri" pitchFamily="34" charset="0"/>
                 <a:ea typeface="Calibri" pitchFamily="34" charset="-122"/>
@@ -2920,7 +2862,7 @@
             <a:r>
               <a:rPr lang="en-US" sz="900" dirty="0">
                 <a:solidFill>
-                  <a:srgbClr val="94A3B8"/>
+                  <a:srgbClr val="64748B"/>
                 </a:solidFill>
                 <a:latin typeface="Calibri" pitchFamily="34" charset="0"/>
                 <a:ea typeface="Calibri" pitchFamily="34" charset="-122"/>
@@ -2932,38 +2874,9 @@
           </a:p>
         </p:txBody>
       </p:sp>
-      <p:sp>
-        <p:nvSpPr>
-          <p:cNvPr id="12" name="Shape 9"/>
-          <p:cNvSpPr/>
-          <p:nvPr/>
-        </p:nvSpPr>
-        <p:spPr>
-          <a:xfrm>
-            <a:off x="7772400" y="4590288"/>
-            <a:ext cx="969264" cy="475488"/>
-          </a:xfrm>
-          <a:prstGeom prst="roundRect">
-            <a:avLst>
-              <a:gd name="adj" fmla="val 11538"/>
-            </a:avLst>
-          </a:prstGeom>
-          <a:solidFill>
-            <a:srgbClr val="FFFFFF"/>
-          </a:solidFill>
-          <a:ln/>
-          <a:effectLst>
-            <a:outerShdw sx="100000" sy="100000" kx="0" ky="0" algn="bl" rotWithShape="0" blurRad="101600" dist="38100" dir="5400000">
-              <a:srgbClr val="000000">
-                <a:alpha val="35000"/>
-              </a:srgbClr>
-            </a:outerShdw>
-          </a:effectLst>
-        </p:spPr>
-      </p:sp>
       <p:pic>
         <p:nvPicPr>
-          <p:cNvPr id="13" name="Image 1" descr="/Users/pop7/Library/CloudStorage/OneDrive-MonsterConnectCo.,Ltd/Lecture/KOSEN69 - software-security/slides/pptx/assets/logo-small.png">    </p:cNvPr>
+          <p:cNvPr id="12" name="Image 1" descr="/Users/pop7/Library/CloudStorage/OneDrive-MonsterConnectCo.,Ltd/Lecture/KOSEN69 - software-security/slides/pptx/assets/logo-small.png">    </p:cNvPr>
           <p:cNvPicPr>
             <a:picLocks noChangeAspect="1"/>
           </p:cNvPicPr>
@@ -2977,7 +2890,7 @@
         </p:blipFill>
         <p:spPr>
           <a:xfrm>
-            <a:off x="7872984" y="4681728"/>
+            <a:off x="7882128" y="4700016"/>
             <a:ext cx="768096" cy="356616"/>
           </a:xfrm>
           <a:prstGeom prst="rect">
@@ -2999,7 +2912,7 @@
     <p:bg>
       <p:bgPr>
         <a:solidFill>
-          <a:srgbClr val="0E1726"/>
+          <a:srgbClr val="FFFFFF"/>
         </a:solidFill>
       </p:bgPr>
     </p:bg>
@@ -3036,9 +2949,9 @@
           </a:solidFill>
           <a:ln/>
           <a:effectLst>
-            <a:outerShdw sx="100000" sy="100000" kx="0" ky="0" algn="bl" rotWithShape="0" blurRad="101600" dist="38100" dir="5400000">
+            <a:outerShdw sx="100000" sy="100000" kx="0" ky="0" algn="bl" rotWithShape="0" blurRad="76200" dist="25400" dir="5400000">
               <a:srgbClr val="000000">
-                <a:alpha val="35000"/>
+                <a:alpha val="12000"/>
               </a:srgbClr>
             </a:outerShdw>
           </a:effectLst>
@@ -3095,7 +3008,7 @@
             <a:r>
               <a:rPr lang="en-US" sz="2600" b="1" dirty="0">
                 <a:solidFill>
-                  <a:srgbClr val="E6EDF3"/>
+                  <a:srgbClr val="1F2937"/>
                 </a:solidFill>
                 <a:latin typeface="Arial" pitchFamily="34" charset="0"/>
                 <a:ea typeface="Arial" pitchFamily="34" charset="-122"/>
@@ -3124,13 +3037,13 @@
             </a:avLst>
           </a:prstGeom>
           <a:solidFill>
-            <a:srgbClr val="18243A"/>
+            <a:srgbClr val="F1F5F9"/>
           </a:solidFill>
           <a:ln/>
           <a:effectLst>
-            <a:outerShdw sx="100000" sy="100000" kx="0" ky="0" algn="bl" rotWithShape="0" blurRad="101600" dist="38100" dir="5400000">
+            <a:outerShdw sx="100000" sy="100000" kx="0" ky="0" algn="bl" rotWithShape="0" blurRad="76200" dist="25400" dir="5400000">
               <a:srgbClr val="000000">
-                <a:alpha val="35000"/>
+                <a:alpha val="12000"/>
               </a:srgbClr>
             </a:outerShdw>
           </a:effectLst>
@@ -3167,7 +3080,7 @@
             <a:r>
               <a:rPr lang="en-US" sz="1400" dirty="0">
                 <a:solidFill>
-                  <a:srgbClr val="E6EDF3"/>
+                  <a:srgbClr val="1F2937"/>
                 </a:solidFill>
                 <a:latin typeface="Calibri" pitchFamily="34" charset="0"/>
                 <a:ea typeface="Calibri" pitchFamily="34" charset="-122"/>
@@ -3188,7 +3101,7 @@
             <a:r>
               <a:rPr lang="en-US" sz="1400" dirty="0">
                 <a:solidFill>
-                  <a:srgbClr val="E6EDF3"/>
+                  <a:srgbClr val="1F2937"/>
                 </a:solidFill>
                 <a:latin typeface="Calibri" pitchFamily="34" charset="0"/>
                 <a:ea typeface="Calibri" pitchFamily="34" charset="-122"/>
@@ -3209,7 +3122,7 @@
             <a:r>
               <a:rPr lang="en-US" sz="1400" dirty="0">
                 <a:solidFill>
-                  <a:srgbClr val="E6EDF3"/>
+                  <a:srgbClr val="1F2937"/>
                 </a:solidFill>
                 <a:latin typeface="Calibri" pitchFamily="34" charset="0"/>
                 <a:ea typeface="Calibri" pitchFamily="34" charset="-122"/>
@@ -3248,7 +3161,7 @@
             <a:r>
               <a:rPr lang="en-US" sz="900" dirty="0">
                 <a:solidFill>
-                  <a:srgbClr val="94A3B8"/>
+                  <a:srgbClr val="64748B"/>
                 </a:solidFill>
                 <a:latin typeface="Calibri" pitchFamily="34" charset="0"/>
                 <a:ea typeface="Calibri" pitchFamily="34" charset="-122"/>
@@ -3260,38 +3173,9 @@
           </a:p>
         </p:txBody>
       </p:sp>
-      <p:sp>
-        <p:nvSpPr>
-          <p:cNvPr id="8" name="Shape 5"/>
-          <p:cNvSpPr/>
-          <p:nvPr/>
-        </p:nvSpPr>
-        <p:spPr>
-          <a:xfrm>
-            <a:off x="7772400" y="4590288"/>
-            <a:ext cx="969264" cy="475488"/>
-          </a:xfrm>
-          <a:prstGeom prst="roundRect">
-            <a:avLst>
-              <a:gd name="adj" fmla="val 11538"/>
-            </a:avLst>
-          </a:prstGeom>
-          <a:solidFill>
-            <a:srgbClr val="FFFFFF"/>
-          </a:solidFill>
-          <a:ln/>
-          <a:effectLst>
-            <a:outerShdw sx="100000" sy="100000" kx="0" ky="0" algn="bl" rotWithShape="0" blurRad="101600" dist="38100" dir="5400000">
-              <a:srgbClr val="000000">
-                <a:alpha val="35000"/>
-              </a:srgbClr>
-            </a:outerShdw>
-          </a:effectLst>
-        </p:spPr>
-      </p:sp>
       <p:pic>
         <p:nvPicPr>
-          <p:cNvPr id="9" name="Image 1" descr="/Users/pop7/Library/CloudStorage/OneDrive-MonsterConnectCo.,Ltd/Lecture/KOSEN69 - software-security/slides/pptx/assets/logo-small.png">    </p:cNvPr>
+          <p:cNvPr id="8" name="Image 1" descr="/Users/pop7/Library/CloudStorage/OneDrive-MonsterConnectCo.,Ltd/Lecture/KOSEN69 - software-security/slides/pptx/assets/logo-small.png">    </p:cNvPr>
           <p:cNvPicPr>
             <a:picLocks noChangeAspect="1"/>
           </p:cNvPicPr>
@@ -3305,7 +3189,7 @@
         </p:blipFill>
         <p:spPr>
           <a:xfrm>
-            <a:off x="7872984" y="4681728"/>
+            <a:off x="7882128" y="4700016"/>
             <a:ext cx="768096" cy="356616"/>
           </a:xfrm>
           <a:prstGeom prst="rect">
@@ -3327,7 +3211,7 @@
     <p:bg>
       <p:bgPr>
         <a:solidFill>
-          <a:srgbClr val="0E1726"/>
+          <a:srgbClr val="FFFFFF"/>
         </a:solidFill>
       </p:bgPr>
     </p:bg>
@@ -3364,9 +3248,9 @@
           </a:solidFill>
           <a:ln/>
           <a:effectLst>
-            <a:outerShdw sx="100000" sy="100000" kx="0" ky="0" algn="bl" rotWithShape="0" blurRad="101600" dist="38100" dir="5400000">
+            <a:outerShdw sx="100000" sy="100000" kx="0" ky="0" algn="bl" rotWithShape="0" blurRad="76200" dist="25400" dir="5400000">
               <a:srgbClr val="000000">
-                <a:alpha val="35000"/>
+                <a:alpha val="12000"/>
               </a:srgbClr>
             </a:outerShdw>
           </a:effectLst>
@@ -3423,7 +3307,7 @@
             <a:r>
               <a:rPr lang="en-US" sz="2600" b="1" dirty="0">
                 <a:solidFill>
-                  <a:srgbClr val="E6EDF3"/>
+                  <a:srgbClr val="1F2937"/>
                 </a:solidFill>
                 <a:latin typeface="Arial" pitchFamily="34" charset="0"/>
                 <a:ea typeface="Arial" pitchFamily="34" charset="-122"/>
@@ -3452,13 +3336,13 @@
             </a:avLst>
           </a:prstGeom>
           <a:solidFill>
-            <a:srgbClr val="18243A"/>
+            <a:srgbClr val="F1F5F9"/>
           </a:solidFill>
           <a:ln/>
           <a:effectLst>
-            <a:outerShdw sx="100000" sy="100000" kx="0" ky="0" algn="bl" rotWithShape="0" blurRad="101600" dist="38100" dir="5400000">
+            <a:outerShdw sx="100000" sy="100000" kx="0" ky="0" algn="bl" rotWithShape="0" blurRad="76200" dist="25400" dir="5400000">
               <a:srgbClr val="000000">
-                <a:alpha val="35000"/>
+                <a:alpha val="12000"/>
               </a:srgbClr>
             </a:outerShdw>
           </a:effectLst>
@@ -3495,7 +3379,7 @@
             <a:r>
               <a:rPr lang="en-US" sz="1400" dirty="0">
                 <a:solidFill>
-                  <a:srgbClr val="E6EDF3"/>
+                  <a:srgbClr val="1F2937"/>
                 </a:solidFill>
                 <a:latin typeface="Calibri" pitchFamily="34" charset="0"/>
                 <a:ea typeface="Calibri" pitchFamily="34" charset="-122"/>
@@ -3516,7 +3400,7 @@
             <a:r>
               <a:rPr lang="en-US" sz="1400" dirty="0">
                 <a:solidFill>
-                  <a:srgbClr val="E6EDF3"/>
+                  <a:srgbClr val="1F2937"/>
                 </a:solidFill>
                 <a:latin typeface="Calibri" pitchFamily="34" charset="0"/>
                 <a:ea typeface="Calibri" pitchFamily="34" charset="-122"/>
@@ -3537,7 +3421,7 @@
             <a:r>
               <a:rPr lang="en-US" sz="1400" dirty="0">
                 <a:solidFill>
-                  <a:srgbClr val="E6EDF3"/>
+                  <a:srgbClr val="1F2937"/>
                 </a:solidFill>
                 <a:latin typeface="Calibri" pitchFamily="34" charset="0"/>
                 <a:ea typeface="Calibri" pitchFamily="34" charset="-122"/>
@@ -3576,7 +3460,7 @@
             <a:r>
               <a:rPr lang="en-US" sz="900" dirty="0">
                 <a:solidFill>
-                  <a:srgbClr val="94A3B8"/>
+                  <a:srgbClr val="64748B"/>
                 </a:solidFill>
                 <a:latin typeface="Calibri" pitchFamily="34" charset="0"/>
                 <a:ea typeface="Calibri" pitchFamily="34" charset="-122"/>
@@ -3588,38 +3472,9 @@
           </a:p>
         </p:txBody>
       </p:sp>
-      <p:sp>
-        <p:nvSpPr>
-          <p:cNvPr id="8" name="Shape 5"/>
-          <p:cNvSpPr/>
-          <p:nvPr/>
-        </p:nvSpPr>
-        <p:spPr>
-          <a:xfrm>
-            <a:off x="7772400" y="4590288"/>
-            <a:ext cx="969264" cy="475488"/>
-          </a:xfrm>
-          <a:prstGeom prst="roundRect">
-            <a:avLst>
-              <a:gd name="adj" fmla="val 11538"/>
-            </a:avLst>
-          </a:prstGeom>
-          <a:solidFill>
-            <a:srgbClr val="FFFFFF"/>
-          </a:solidFill>
-          <a:ln/>
-          <a:effectLst>
-            <a:outerShdw sx="100000" sy="100000" kx="0" ky="0" algn="bl" rotWithShape="0" blurRad="101600" dist="38100" dir="5400000">
-              <a:srgbClr val="000000">
-                <a:alpha val="35000"/>
-              </a:srgbClr>
-            </a:outerShdw>
-          </a:effectLst>
-        </p:spPr>
-      </p:sp>
       <p:pic>
         <p:nvPicPr>
-          <p:cNvPr id="9" name="Image 1" descr="/Users/pop7/Library/CloudStorage/OneDrive-MonsterConnectCo.,Ltd/Lecture/KOSEN69 - software-security/slides/pptx/assets/logo-small.png">    </p:cNvPr>
+          <p:cNvPr id="8" name="Image 1" descr="/Users/pop7/Library/CloudStorage/OneDrive-MonsterConnectCo.,Ltd/Lecture/KOSEN69 - software-security/slides/pptx/assets/logo-small.png">    </p:cNvPr>
           <p:cNvPicPr>
             <a:picLocks noChangeAspect="1"/>
           </p:cNvPicPr>
@@ -3633,7 +3488,7 @@
         </p:blipFill>
         <p:spPr>
           <a:xfrm>
-            <a:off x="7872984" y="4681728"/>
+            <a:off x="7882128" y="4700016"/>
             <a:ext cx="768096" cy="356616"/>
           </a:xfrm>
           <a:prstGeom prst="rect">
@@ -3655,7 +3510,7 @@
     <p:bg>
       <p:bgPr>
         <a:solidFill>
-          <a:srgbClr val="0E1726"/>
+          <a:srgbClr val="FFFFFF"/>
         </a:solidFill>
       </p:bgPr>
     </p:bg>
@@ -3700,7 +3555,7 @@
             <a:r>
               <a:rPr lang="en-US" sz="4600" b="1" dirty="0">
                 <a:solidFill>
-                  <a:srgbClr val="E6EDF3"/>
+                  <a:srgbClr val="1F2937"/>
                 </a:solidFill>
                 <a:latin typeface="Arial" pitchFamily="34" charset="0"/>
                 <a:ea typeface="Arial" pitchFamily="34" charset="-122"/>
@@ -3751,38 +3606,9 @@
           </a:p>
         </p:txBody>
       </p:sp>
-      <p:sp>
-        <p:nvSpPr>
-          <p:cNvPr id="4" name="Shape 2"/>
-          <p:cNvSpPr/>
-          <p:nvPr/>
-        </p:nvSpPr>
-        <p:spPr>
-          <a:xfrm>
-            <a:off x="7772400" y="4590288"/>
-            <a:ext cx="969264" cy="475488"/>
-          </a:xfrm>
-          <a:prstGeom prst="roundRect">
-            <a:avLst>
-              <a:gd name="adj" fmla="val 11538"/>
-            </a:avLst>
-          </a:prstGeom>
-          <a:solidFill>
-            <a:srgbClr val="FFFFFF"/>
-          </a:solidFill>
-          <a:ln/>
-          <a:effectLst>
-            <a:outerShdw sx="100000" sy="100000" kx="0" ky="0" algn="bl" rotWithShape="0" blurRad="101600" dist="38100" dir="5400000">
-              <a:srgbClr val="000000">
-                <a:alpha val="35000"/>
-              </a:srgbClr>
-            </a:outerShdw>
-          </a:effectLst>
-        </p:spPr>
-      </p:sp>
       <p:pic>
         <p:nvPicPr>
-          <p:cNvPr id="5" name="Image 0" descr="/Users/pop7/Library/CloudStorage/OneDrive-MonsterConnectCo.,Ltd/Lecture/KOSEN69 - software-security/slides/pptx/assets/logo-small.png">    </p:cNvPr>
+          <p:cNvPr id="4" name="Image 0" descr="/Users/pop7/Library/CloudStorage/OneDrive-MonsterConnectCo.,Ltd/Lecture/KOSEN69 - software-security/slides/pptx/assets/logo-small.png">    </p:cNvPr>
           <p:cNvPicPr>
             <a:picLocks noChangeAspect="1"/>
           </p:cNvPicPr>
@@ -3796,7 +3622,7 @@
         </p:blipFill>
         <p:spPr>
           <a:xfrm>
-            <a:off x="7872984" y="4681728"/>
+            <a:off x="7882128" y="4700016"/>
             <a:ext cx="768096" cy="356616"/>
           </a:xfrm>
           <a:prstGeom prst="rect">
@@ -3818,7 +3644,7 @@
     <p:bg>
       <p:bgPr>
         <a:solidFill>
-          <a:srgbClr val="0E1726"/>
+          <a:srgbClr val="FFFFFF"/>
         </a:solidFill>
       </p:bgPr>
     </p:bg>
@@ -3855,9 +3681,9 @@
           </a:solidFill>
           <a:ln/>
           <a:effectLst>
-            <a:outerShdw sx="100000" sy="100000" kx="0" ky="0" algn="bl" rotWithShape="0" blurRad="101600" dist="38100" dir="5400000">
+            <a:outerShdw sx="100000" sy="100000" kx="0" ky="0" algn="bl" rotWithShape="0" blurRad="76200" dist="25400" dir="5400000">
               <a:srgbClr val="000000">
-                <a:alpha val="35000"/>
+                <a:alpha val="12000"/>
               </a:srgbClr>
             </a:outerShdw>
           </a:effectLst>
@@ -3914,7 +3740,7 @@
             <a:r>
               <a:rPr lang="en-US" sz="2600" b="1" dirty="0">
                 <a:solidFill>
-                  <a:srgbClr val="E6EDF3"/>
+                  <a:srgbClr val="1F2937"/>
                 </a:solidFill>
                 <a:latin typeface="Arial" pitchFamily="34" charset="0"/>
                 <a:ea typeface="Arial" pitchFamily="34" charset="-122"/>
@@ -3943,13 +3769,13 @@
             </a:avLst>
           </a:prstGeom>
           <a:solidFill>
-            <a:srgbClr val="18243A"/>
+            <a:srgbClr val="F1F5F9"/>
           </a:solidFill>
           <a:ln/>
           <a:effectLst>
-            <a:outerShdw sx="100000" sy="100000" kx="0" ky="0" algn="bl" rotWithShape="0" blurRad="101600" dist="38100" dir="5400000">
+            <a:outerShdw sx="100000" sy="100000" kx="0" ky="0" algn="bl" rotWithShape="0" blurRad="76200" dist="25400" dir="5400000">
               <a:srgbClr val="000000">
-                <a:alpha val="35000"/>
+                <a:alpha val="12000"/>
               </a:srgbClr>
             </a:outerShdw>
           </a:effectLst>
@@ -3986,7 +3812,7 @@
             <a:r>
               <a:rPr lang="en-US" sz="1400" dirty="0">
                 <a:solidFill>
-                  <a:srgbClr val="E6EDF3"/>
+                  <a:srgbClr val="1F2937"/>
                 </a:solidFill>
                 <a:latin typeface="Calibri" pitchFamily="34" charset="0"/>
                 <a:ea typeface="Calibri" pitchFamily="34" charset="-122"/>
@@ -4007,7 +3833,7 @@
             <a:r>
               <a:rPr lang="en-US" sz="1400" dirty="0">
                 <a:solidFill>
-                  <a:srgbClr val="E6EDF3"/>
+                  <a:srgbClr val="1F2937"/>
                 </a:solidFill>
                 <a:latin typeface="Calibri" pitchFamily="34" charset="0"/>
                 <a:ea typeface="Calibri" pitchFamily="34" charset="-122"/>
@@ -4028,7 +3854,7 @@
             <a:r>
               <a:rPr lang="en-US" sz="1400" dirty="0">
                 <a:solidFill>
-                  <a:srgbClr val="E6EDF3"/>
+                  <a:srgbClr val="1F2937"/>
                 </a:solidFill>
                 <a:latin typeface="Calibri" pitchFamily="34" charset="0"/>
                 <a:ea typeface="Calibri" pitchFamily="34" charset="-122"/>
@@ -4049,7 +3875,7 @@
             <a:r>
               <a:rPr lang="en-US" sz="1400" dirty="0">
                 <a:solidFill>
-                  <a:srgbClr val="E6EDF3"/>
+                  <a:srgbClr val="1F2937"/>
                 </a:solidFill>
                 <a:latin typeface="Calibri" pitchFamily="34" charset="0"/>
                 <a:ea typeface="Calibri" pitchFamily="34" charset="-122"/>
@@ -4070,7 +3896,7 @@
             <a:r>
               <a:rPr lang="en-US" sz="1400" dirty="0">
                 <a:solidFill>
-                  <a:srgbClr val="E6EDF3"/>
+                  <a:srgbClr val="1F2937"/>
                 </a:solidFill>
                 <a:latin typeface="Calibri" pitchFamily="34" charset="0"/>
                 <a:ea typeface="Calibri" pitchFamily="34" charset="-122"/>
@@ -4109,7 +3935,7 @@
             <a:r>
               <a:rPr lang="en-US" sz="900" dirty="0">
                 <a:solidFill>
-                  <a:srgbClr val="94A3B8"/>
+                  <a:srgbClr val="64748B"/>
                 </a:solidFill>
                 <a:latin typeface="Calibri" pitchFamily="34" charset="0"/>
                 <a:ea typeface="Calibri" pitchFamily="34" charset="-122"/>
@@ -4121,38 +3947,9 @@
           </a:p>
         </p:txBody>
       </p:sp>
-      <p:sp>
-        <p:nvSpPr>
-          <p:cNvPr id="8" name="Shape 5"/>
-          <p:cNvSpPr/>
-          <p:nvPr/>
-        </p:nvSpPr>
-        <p:spPr>
-          <a:xfrm>
-            <a:off x="7772400" y="4590288"/>
-            <a:ext cx="969264" cy="475488"/>
-          </a:xfrm>
-          <a:prstGeom prst="roundRect">
-            <a:avLst>
-              <a:gd name="adj" fmla="val 11538"/>
-            </a:avLst>
-          </a:prstGeom>
-          <a:solidFill>
-            <a:srgbClr val="FFFFFF"/>
-          </a:solidFill>
-          <a:ln/>
-          <a:effectLst>
-            <a:outerShdw sx="100000" sy="100000" kx="0" ky="0" algn="bl" rotWithShape="0" blurRad="101600" dist="38100" dir="5400000">
-              <a:srgbClr val="000000">
-                <a:alpha val="35000"/>
-              </a:srgbClr>
-            </a:outerShdw>
-          </a:effectLst>
-        </p:spPr>
-      </p:sp>
       <p:pic>
         <p:nvPicPr>
-          <p:cNvPr id="9" name="Image 1" descr="/Users/pop7/Library/CloudStorage/OneDrive-MonsterConnectCo.,Ltd/Lecture/KOSEN69 - software-security/slides/pptx/assets/logo-small.png">    </p:cNvPr>
+          <p:cNvPr id="8" name="Image 1" descr="/Users/pop7/Library/CloudStorage/OneDrive-MonsterConnectCo.,Ltd/Lecture/KOSEN69 - software-security/slides/pptx/assets/logo-small.png">    </p:cNvPr>
           <p:cNvPicPr>
             <a:picLocks noChangeAspect="1"/>
           </p:cNvPicPr>
@@ -4166,7 +3963,7 @@
         </p:blipFill>
         <p:spPr>
           <a:xfrm>
-            <a:off x="7872984" y="4681728"/>
+            <a:off x="7882128" y="4700016"/>
             <a:ext cx="768096" cy="356616"/>
           </a:xfrm>
           <a:prstGeom prst="rect">
@@ -4188,7 +3985,7 @@
     <p:bg>
       <p:bgPr>
         <a:solidFill>
-          <a:srgbClr val="0E1726"/>
+          <a:srgbClr val="FFFFFF"/>
         </a:solidFill>
       </p:bgPr>
     </p:bg>
@@ -4225,9 +4022,9 @@
           </a:solidFill>
           <a:ln/>
           <a:effectLst>
-            <a:outerShdw sx="100000" sy="100000" kx="0" ky="0" algn="bl" rotWithShape="0" blurRad="101600" dist="38100" dir="5400000">
+            <a:outerShdw sx="100000" sy="100000" kx="0" ky="0" algn="bl" rotWithShape="0" blurRad="76200" dist="25400" dir="5400000">
               <a:srgbClr val="000000">
-                <a:alpha val="35000"/>
+                <a:alpha val="12000"/>
               </a:srgbClr>
             </a:outerShdw>
           </a:effectLst>
@@ -4284,7 +4081,7 @@
             <a:r>
               <a:rPr lang="en-US" sz="2600" b="1" dirty="0">
                 <a:solidFill>
-                  <a:srgbClr val="E6EDF3"/>
+                  <a:srgbClr val="1F2937"/>
                 </a:solidFill>
                 <a:latin typeface="Arial" pitchFamily="34" charset="0"/>
                 <a:ea typeface="Arial" pitchFamily="34" charset="-122"/>
@@ -4313,13 +4110,13 @@
             </a:avLst>
           </a:prstGeom>
           <a:solidFill>
-            <a:srgbClr val="18243A"/>
+            <a:srgbClr val="F1F5F9"/>
           </a:solidFill>
           <a:ln/>
           <a:effectLst>
-            <a:outerShdw sx="100000" sy="100000" kx="0" ky="0" algn="bl" rotWithShape="0" blurRad="101600" dist="38100" dir="5400000">
+            <a:outerShdw sx="100000" sy="100000" kx="0" ky="0" algn="bl" rotWithShape="0" blurRad="76200" dist="25400" dir="5400000">
               <a:srgbClr val="000000">
-                <a:alpha val="35000"/>
+                <a:alpha val="12000"/>
               </a:srgbClr>
             </a:outerShdw>
           </a:effectLst>
@@ -4356,7 +4153,7 @@
             <a:r>
               <a:rPr lang="en-US" sz="1400" dirty="0">
                 <a:solidFill>
-                  <a:srgbClr val="E6EDF3"/>
+                  <a:srgbClr val="1F2937"/>
                 </a:solidFill>
                 <a:latin typeface="Calibri" pitchFamily="34" charset="0"/>
                 <a:ea typeface="Calibri" pitchFamily="34" charset="-122"/>
@@ -4377,7 +4174,7 @@
             <a:r>
               <a:rPr lang="en-US" sz="1400" dirty="0">
                 <a:solidFill>
-                  <a:srgbClr val="E6EDF3"/>
+                  <a:srgbClr val="1F2937"/>
                 </a:solidFill>
                 <a:latin typeface="Calibri" pitchFamily="34" charset="0"/>
                 <a:ea typeface="Calibri" pitchFamily="34" charset="-122"/>
@@ -4398,7 +4195,7 @@
             <a:r>
               <a:rPr lang="en-US" sz="1400" dirty="0">
                 <a:solidFill>
-                  <a:srgbClr val="E6EDF3"/>
+                  <a:srgbClr val="1F2937"/>
                 </a:solidFill>
                 <a:latin typeface="Calibri" pitchFamily="34" charset="0"/>
                 <a:ea typeface="Calibri" pitchFamily="34" charset="-122"/>
@@ -4437,7 +4234,7 @@
             <a:r>
               <a:rPr lang="en-US" sz="900" dirty="0">
                 <a:solidFill>
-                  <a:srgbClr val="94A3B8"/>
+                  <a:srgbClr val="64748B"/>
                 </a:solidFill>
                 <a:latin typeface="Calibri" pitchFamily="34" charset="0"/>
                 <a:ea typeface="Calibri" pitchFamily="34" charset="-122"/>
@@ -4449,38 +4246,9 @@
           </a:p>
         </p:txBody>
       </p:sp>
-      <p:sp>
-        <p:nvSpPr>
-          <p:cNvPr id="8" name="Shape 5"/>
-          <p:cNvSpPr/>
-          <p:nvPr/>
-        </p:nvSpPr>
-        <p:spPr>
-          <a:xfrm>
-            <a:off x="7772400" y="4590288"/>
-            <a:ext cx="969264" cy="475488"/>
-          </a:xfrm>
-          <a:prstGeom prst="roundRect">
-            <a:avLst>
-              <a:gd name="adj" fmla="val 11538"/>
-            </a:avLst>
-          </a:prstGeom>
-          <a:solidFill>
-            <a:srgbClr val="FFFFFF"/>
-          </a:solidFill>
-          <a:ln/>
-          <a:effectLst>
-            <a:outerShdw sx="100000" sy="100000" kx="0" ky="0" algn="bl" rotWithShape="0" blurRad="101600" dist="38100" dir="5400000">
-              <a:srgbClr val="000000">
-                <a:alpha val="35000"/>
-              </a:srgbClr>
-            </a:outerShdw>
-          </a:effectLst>
-        </p:spPr>
-      </p:sp>
       <p:pic>
         <p:nvPicPr>
-          <p:cNvPr id="9" name="Image 1" descr="/Users/pop7/Library/CloudStorage/OneDrive-MonsterConnectCo.,Ltd/Lecture/KOSEN69 - software-security/slides/pptx/assets/logo-small.png">    </p:cNvPr>
+          <p:cNvPr id="8" name="Image 1" descr="/Users/pop7/Library/CloudStorage/OneDrive-MonsterConnectCo.,Ltd/Lecture/KOSEN69 - software-security/slides/pptx/assets/logo-small.png">    </p:cNvPr>
           <p:cNvPicPr>
             <a:picLocks noChangeAspect="1"/>
           </p:cNvPicPr>
@@ -4494,7 +4262,7 @@
         </p:blipFill>
         <p:spPr>
           <a:xfrm>
-            <a:off x="7872984" y="4681728"/>
+            <a:off x="7882128" y="4700016"/>
             <a:ext cx="768096" cy="356616"/>
           </a:xfrm>
           <a:prstGeom prst="rect">
@@ -4516,7 +4284,7 @@
     <p:bg>
       <p:bgPr>
         <a:solidFill>
-          <a:srgbClr val="0E1726"/>
+          <a:srgbClr val="FFFFFF"/>
         </a:solidFill>
       </p:bgPr>
     </p:bg>
@@ -4553,9 +4321,9 @@
           </a:solidFill>
           <a:ln/>
           <a:effectLst>
-            <a:outerShdw sx="100000" sy="100000" kx="0" ky="0" algn="bl" rotWithShape="0" blurRad="101600" dist="38100" dir="5400000">
+            <a:outerShdw sx="100000" sy="100000" kx="0" ky="0" algn="bl" rotWithShape="0" blurRad="76200" dist="25400" dir="5400000">
               <a:srgbClr val="000000">
-                <a:alpha val="35000"/>
+                <a:alpha val="12000"/>
               </a:srgbClr>
             </a:outerShdw>
           </a:effectLst>
@@ -4612,7 +4380,7 @@
             <a:r>
               <a:rPr lang="en-US" sz="2600" b="1" dirty="0">
                 <a:solidFill>
-                  <a:srgbClr val="E6EDF3"/>
+                  <a:srgbClr val="1F2937"/>
                 </a:solidFill>
                 <a:latin typeface="Arial" pitchFamily="34" charset="0"/>
                 <a:ea typeface="Arial" pitchFamily="34" charset="-122"/>
@@ -4673,7 +4441,7 @@
                   <a:tcPr marL="76200" marR="76200" marT="38100" marB="38100" anchor="ctr">
                     <a:lnL w="12700" cap="flat" cmpd="sng" algn="ctr">
                       <a:solidFill>
-                        <a:srgbClr val="0E1726"/>
+                        <a:srgbClr val="FFFFFF"/>
                       </a:solidFill>
                       <a:prstDash val="solid"/>
                       <a:round/>
@@ -4682,7 +4450,7 @@
                     </a:lnL>
                     <a:lnR w="12700" cap="flat" cmpd="sng" algn="ctr">
                       <a:solidFill>
-                        <a:srgbClr val="0E1726"/>
+                        <a:srgbClr val="FFFFFF"/>
                       </a:solidFill>
                       <a:prstDash val="solid"/>
                       <a:round/>
@@ -4691,7 +4459,7 @@
                     </a:lnR>
                     <a:lnT w="12700" cap="flat" cmpd="sng" algn="ctr">
                       <a:solidFill>
-                        <a:srgbClr val="0E1726"/>
+                        <a:srgbClr val="FFFFFF"/>
                       </a:solidFill>
                       <a:prstDash val="solid"/>
                       <a:round/>
@@ -4700,7 +4468,7 @@
                     </a:lnT>
                     <a:lnB w="12700" cap="flat" cmpd="sng" algn="ctr">
                       <a:solidFill>
-                        <a:srgbClr val="0E1726"/>
+                        <a:srgbClr val="FFFFFF"/>
                       </a:solidFill>
                       <a:prstDash val="solid"/>
                       <a:round/>
@@ -4734,7 +4502,7 @@
                   <a:tcPr marL="76200" marR="76200" marT="38100" marB="38100" anchor="ctr">
                     <a:lnL w="12700" cap="flat" cmpd="sng" algn="ctr">
                       <a:solidFill>
-                        <a:srgbClr val="0E1726"/>
+                        <a:srgbClr val="FFFFFF"/>
                       </a:solidFill>
                       <a:prstDash val="solid"/>
                       <a:round/>
@@ -4743,7 +4511,7 @@
                     </a:lnL>
                     <a:lnR w="12700" cap="flat" cmpd="sng" algn="ctr">
                       <a:solidFill>
-                        <a:srgbClr val="0E1726"/>
+                        <a:srgbClr val="FFFFFF"/>
                       </a:solidFill>
                       <a:prstDash val="solid"/>
                       <a:round/>
@@ -4752,7 +4520,7 @@
                     </a:lnR>
                     <a:lnT w="12700" cap="flat" cmpd="sng" algn="ctr">
                       <a:solidFill>
-                        <a:srgbClr val="0E1726"/>
+                        <a:srgbClr val="FFFFFF"/>
                       </a:solidFill>
                       <a:prstDash val="solid"/>
                       <a:round/>
@@ -4761,7 +4529,7 @@
                     </a:lnT>
                     <a:lnB w="12700" cap="flat" cmpd="sng" algn="ctr">
                       <a:solidFill>
-                        <a:srgbClr val="0E1726"/>
+                        <a:srgbClr val="FFFFFF"/>
                       </a:solidFill>
                       <a:prstDash val="solid"/>
                       <a:round/>
@@ -4786,7 +4554,7 @@
                       <a:r>
                         <a:rPr lang="en-US" sz="1200" dirty="0">
                           <a:solidFill>
-                            <a:srgbClr val="E6EDF3"/>
+                            <a:srgbClr val="1F2937"/>
                           </a:solidFill>
                         </a:rPr>
                         <a:t>SolarWinds (2020)</a:t>
@@ -4797,7 +4565,7 @@
                   <a:tcPr marL="76200" marR="76200" marT="38100" marB="38100" anchor="ctr">
                     <a:lnL w="12700" cap="flat" cmpd="sng" algn="ctr">
                       <a:solidFill>
-                        <a:srgbClr val="0E1726"/>
+                        <a:srgbClr val="FFFFFF"/>
                       </a:solidFill>
                       <a:prstDash val="solid"/>
                       <a:round/>
@@ -4806,7 +4574,7 @@
                     </a:lnL>
                     <a:lnR w="12700" cap="flat" cmpd="sng" algn="ctr">
                       <a:solidFill>
-                        <a:srgbClr val="0E1726"/>
+                        <a:srgbClr val="FFFFFF"/>
                       </a:solidFill>
                       <a:prstDash val="solid"/>
                       <a:round/>
@@ -4815,7 +4583,7 @@
                     </a:lnR>
                     <a:lnT w="12700" cap="flat" cmpd="sng" algn="ctr">
                       <a:solidFill>
-                        <a:srgbClr val="0E1726"/>
+                        <a:srgbClr val="FFFFFF"/>
                       </a:solidFill>
                       <a:prstDash val="solid"/>
                       <a:round/>
@@ -4824,7 +4592,7 @@
                     </a:lnT>
                     <a:lnB w="12700" cap="flat" cmpd="sng" algn="ctr">
                       <a:solidFill>
-                        <a:srgbClr val="0E1726"/>
+                        <a:srgbClr val="FFFFFF"/>
                       </a:solidFill>
                       <a:prstDash val="solid"/>
                       <a:round/>
@@ -4832,7 +4600,7 @@
                       <a:tailEnd type="none" w="med" len="med"/>
                     </a:lnB>
                     <a:solidFill>
-                      <a:srgbClr val="18243A"/>
+                      <a:srgbClr val="F1F5F9"/>
                     </a:solidFill>
                   </a:tcPr>
                 </a:tc>
@@ -4847,7 +4615,7 @@
                       <a:r>
                         <a:rPr lang="en-US" sz="1200" dirty="0">
                           <a:solidFill>
-                            <a:srgbClr val="E6EDF3"/>
+                            <a:srgbClr val="1F2937"/>
                           </a:solidFill>
                         </a:rPr>
                         <a:t>trojanized vendor update → 18k orgs</a:t>
@@ -4858,7 +4626,7 @@
                   <a:tcPr marL="76200" marR="76200" marT="38100" marB="38100" anchor="ctr">
                     <a:lnL w="12700" cap="flat" cmpd="sng" algn="ctr">
                       <a:solidFill>
-                        <a:srgbClr val="0E1726"/>
+                        <a:srgbClr val="FFFFFF"/>
                       </a:solidFill>
                       <a:prstDash val="solid"/>
                       <a:round/>
@@ -4867,7 +4635,7 @@
                     </a:lnL>
                     <a:lnR w="12700" cap="flat" cmpd="sng" algn="ctr">
                       <a:solidFill>
-                        <a:srgbClr val="0E1726"/>
+                        <a:srgbClr val="FFFFFF"/>
                       </a:solidFill>
                       <a:prstDash val="solid"/>
                       <a:round/>
@@ -4876,7 +4644,7 @@
                     </a:lnR>
                     <a:lnT w="12700" cap="flat" cmpd="sng" algn="ctr">
                       <a:solidFill>
-                        <a:srgbClr val="0E1726"/>
+                        <a:srgbClr val="FFFFFF"/>
                       </a:solidFill>
                       <a:prstDash val="solid"/>
                       <a:round/>
@@ -4885,7 +4653,7 @@
                     </a:lnT>
                     <a:lnB w="12700" cap="flat" cmpd="sng" algn="ctr">
                       <a:solidFill>
-                        <a:srgbClr val="0E1726"/>
+                        <a:srgbClr val="FFFFFF"/>
                       </a:solidFill>
                       <a:prstDash val="solid"/>
                       <a:round/>
@@ -4893,7 +4661,7 @@
                       <a:tailEnd type="none" w="med" len="med"/>
                     </a:lnB>
                     <a:solidFill>
-                      <a:srgbClr val="18243A"/>
+                      <a:srgbClr val="F1F5F9"/>
                     </a:solidFill>
                   </a:tcPr>
                 </a:tc>
@@ -4910,7 +4678,7 @@
                       <a:r>
                         <a:rPr lang="en-US" sz="1200" dirty="0">
                           <a:solidFill>
-                            <a:srgbClr val="E6EDF3"/>
+                            <a:srgbClr val="1F2937"/>
                           </a:solidFill>
                         </a:rPr>
                         <a:t>Log4Shell (2021)</a:t>
@@ -4921,7 +4689,7 @@
                   <a:tcPr marL="76200" marR="76200" marT="38100" marB="38100" anchor="ctr">
                     <a:lnL w="12700" cap="flat" cmpd="sng" algn="ctr">
                       <a:solidFill>
-                        <a:srgbClr val="0E1726"/>
+                        <a:srgbClr val="FFFFFF"/>
                       </a:solidFill>
                       <a:prstDash val="solid"/>
                       <a:round/>
@@ -4930,7 +4698,7 @@
                     </a:lnL>
                     <a:lnR w="12700" cap="flat" cmpd="sng" algn="ctr">
                       <a:solidFill>
-                        <a:srgbClr val="0E1726"/>
+                        <a:srgbClr val="FFFFFF"/>
                       </a:solidFill>
                       <a:prstDash val="solid"/>
                       <a:round/>
@@ -4939,7 +4707,7 @@
                     </a:lnR>
                     <a:lnT w="12700" cap="flat" cmpd="sng" algn="ctr">
                       <a:solidFill>
-                        <a:srgbClr val="0E1726"/>
+                        <a:srgbClr val="FFFFFF"/>
                       </a:solidFill>
                       <a:prstDash val="solid"/>
                       <a:round/>
@@ -4948,7 +4716,7 @@
                     </a:lnT>
                     <a:lnB w="12700" cap="flat" cmpd="sng" algn="ctr">
                       <a:solidFill>
-                        <a:srgbClr val="0E1726"/>
+                        <a:srgbClr val="FFFFFF"/>
                       </a:solidFill>
                       <a:prstDash val="solid"/>
                       <a:round/>
@@ -4956,7 +4724,7 @@
                       <a:tailEnd type="none" w="med" len="med"/>
                     </a:lnB>
                     <a:solidFill>
-                      <a:srgbClr val="1E2B45"/>
+                      <a:srgbClr val="E8EDF3"/>
                     </a:solidFill>
                   </a:tcPr>
                 </a:tc>
@@ -4971,7 +4739,7 @@
                       <a:r>
                         <a:rPr lang="en-US" sz="1200" dirty="0">
                           <a:solidFill>
-                            <a:srgbClr val="E6EDF3"/>
+                            <a:srgbClr val="1F2937"/>
                           </a:solidFill>
                         </a:rPr>
                         <a:t>RCE in a ubiquitous logging dep</a:t>
@@ -4982,7 +4750,7 @@
                   <a:tcPr marL="76200" marR="76200" marT="38100" marB="38100" anchor="ctr">
                     <a:lnL w="12700" cap="flat" cmpd="sng" algn="ctr">
                       <a:solidFill>
-                        <a:srgbClr val="0E1726"/>
+                        <a:srgbClr val="FFFFFF"/>
                       </a:solidFill>
                       <a:prstDash val="solid"/>
                       <a:round/>
@@ -4991,7 +4759,7 @@
                     </a:lnL>
                     <a:lnR w="12700" cap="flat" cmpd="sng" algn="ctr">
                       <a:solidFill>
-                        <a:srgbClr val="0E1726"/>
+                        <a:srgbClr val="FFFFFF"/>
                       </a:solidFill>
                       <a:prstDash val="solid"/>
                       <a:round/>
@@ -5000,7 +4768,7 @@
                     </a:lnR>
                     <a:lnT w="12700" cap="flat" cmpd="sng" algn="ctr">
                       <a:solidFill>
-                        <a:srgbClr val="0E1726"/>
+                        <a:srgbClr val="FFFFFF"/>
                       </a:solidFill>
                       <a:prstDash val="solid"/>
                       <a:round/>
@@ -5009,7 +4777,7 @@
                     </a:lnT>
                     <a:lnB w="12700" cap="flat" cmpd="sng" algn="ctr">
                       <a:solidFill>
-                        <a:srgbClr val="0E1726"/>
+                        <a:srgbClr val="FFFFFF"/>
                       </a:solidFill>
                       <a:prstDash val="solid"/>
                       <a:round/>
@@ -5017,7 +4785,7 @@
                       <a:tailEnd type="none" w="med" len="med"/>
                     </a:lnB>
                     <a:solidFill>
-                      <a:srgbClr val="1E2B45"/>
+                      <a:srgbClr val="E8EDF3"/>
                     </a:solidFill>
                   </a:tcPr>
                 </a:tc>
@@ -5034,7 +4802,7 @@
                       <a:r>
                         <a:rPr lang="en-US" sz="1200" dirty="0">
                           <a:solidFill>
-                            <a:srgbClr val="E6EDF3"/>
+                            <a:srgbClr val="1F2937"/>
                           </a:solidFill>
                         </a:rPr>
                         <a:t>event-stream (npm)</a:t>
@@ -5045,7 +4813,7 @@
                   <a:tcPr marL="76200" marR="76200" marT="38100" marB="38100" anchor="ctr">
                     <a:lnL w="12700" cap="flat" cmpd="sng" algn="ctr">
                       <a:solidFill>
-                        <a:srgbClr val="0E1726"/>
+                        <a:srgbClr val="FFFFFF"/>
                       </a:solidFill>
                       <a:prstDash val="solid"/>
                       <a:round/>
@@ -5054,7 +4822,7 @@
                     </a:lnL>
                     <a:lnR w="12700" cap="flat" cmpd="sng" algn="ctr">
                       <a:solidFill>
-                        <a:srgbClr val="0E1726"/>
+                        <a:srgbClr val="FFFFFF"/>
                       </a:solidFill>
                       <a:prstDash val="solid"/>
                       <a:round/>
@@ -5063,7 +4831,7 @@
                     </a:lnR>
                     <a:lnT w="12700" cap="flat" cmpd="sng" algn="ctr">
                       <a:solidFill>
-                        <a:srgbClr val="0E1726"/>
+                        <a:srgbClr val="FFFFFF"/>
                       </a:solidFill>
                       <a:prstDash val="solid"/>
                       <a:round/>
@@ -5072,7 +4840,7 @@
                     </a:lnT>
                     <a:lnB w="12700" cap="flat" cmpd="sng" algn="ctr">
                       <a:solidFill>
-                        <a:srgbClr val="0E1726"/>
+                        <a:srgbClr val="FFFFFF"/>
                       </a:solidFill>
                       <a:prstDash val="solid"/>
                       <a:round/>
@@ -5080,7 +4848,7 @@
                       <a:tailEnd type="none" w="med" len="med"/>
                     </a:lnB>
                     <a:solidFill>
-                      <a:srgbClr val="18243A"/>
+                      <a:srgbClr val="F1F5F9"/>
                     </a:solidFill>
                   </a:tcPr>
                 </a:tc>
@@ -5095,7 +4863,7 @@
                       <a:r>
                         <a:rPr lang="en-US" sz="1200" dirty="0">
                           <a:solidFill>
-                            <a:srgbClr val="E6EDF3"/>
+                            <a:srgbClr val="1F2937"/>
                           </a:solidFill>
                         </a:rPr>
                         <a:t>malicious dep stole crypto-wallet keys</a:t>
@@ -5106,7 +4874,7 @@
                   <a:tcPr marL="76200" marR="76200" marT="38100" marB="38100" anchor="ctr">
                     <a:lnL w="12700" cap="flat" cmpd="sng" algn="ctr">
                       <a:solidFill>
-                        <a:srgbClr val="0E1726"/>
+                        <a:srgbClr val="FFFFFF"/>
                       </a:solidFill>
                       <a:prstDash val="solid"/>
                       <a:round/>
@@ -5115,7 +4883,7 @@
                     </a:lnL>
                     <a:lnR w="12700" cap="flat" cmpd="sng" algn="ctr">
                       <a:solidFill>
-                        <a:srgbClr val="0E1726"/>
+                        <a:srgbClr val="FFFFFF"/>
                       </a:solidFill>
                       <a:prstDash val="solid"/>
                       <a:round/>
@@ -5124,7 +4892,7 @@
                     </a:lnR>
                     <a:lnT w="12700" cap="flat" cmpd="sng" algn="ctr">
                       <a:solidFill>
-                        <a:srgbClr val="0E1726"/>
+                        <a:srgbClr val="FFFFFF"/>
                       </a:solidFill>
                       <a:prstDash val="solid"/>
                       <a:round/>
@@ -5133,7 +4901,7 @@
                     </a:lnT>
                     <a:lnB w="12700" cap="flat" cmpd="sng" algn="ctr">
                       <a:solidFill>
-                        <a:srgbClr val="0E1726"/>
+                        <a:srgbClr val="FFFFFF"/>
                       </a:solidFill>
                       <a:prstDash val="solid"/>
                       <a:round/>
@@ -5141,7 +4909,7 @@
                       <a:tailEnd type="none" w="med" len="med"/>
                     </a:lnB>
                     <a:solidFill>
-                      <a:srgbClr val="18243A"/>
+                      <a:srgbClr val="F1F5F9"/>
                     </a:solidFill>
                   </a:tcPr>
                 </a:tc>
@@ -5158,7 +4926,7 @@
                       <a:r>
                         <a:rPr lang="en-US" sz="1200" dirty="0">
                           <a:solidFill>
-                            <a:srgbClr val="E6EDF3"/>
+                            <a:srgbClr val="1F2937"/>
                           </a:solidFill>
                         </a:rPr>
                         <a:t>XZ Utils (2024)</a:t>
@@ -5169,7 +4937,7 @@
                   <a:tcPr marL="76200" marR="76200" marT="38100" marB="38100" anchor="ctr">
                     <a:lnL w="12700" cap="flat" cmpd="sng" algn="ctr">
                       <a:solidFill>
-                        <a:srgbClr val="0E1726"/>
+                        <a:srgbClr val="FFFFFF"/>
                       </a:solidFill>
                       <a:prstDash val="solid"/>
                       <a:round/>
@@ -5178,7 +4946,7 @@
                     </a:lnL>
                     <a:lnR w="12700" cap="flat" cmpd="sng" algn="ctr">
                       <a:solidFill>
-                        <a:srgbClr val="0E1726"/>
+                        <a:srgbClr val="FFFFFF"/>
                       </a:solidFill>
                       <a:prstDash val="solid"/>
                       <a:round/>
@@ -5187,7 +4955,7 @@
                     </a:lnR>
                     <a:lnT w="12700" cap="flat" cmpd="sng" algn="ctr">
                       <a:solidFill>
-                        <a:srgbClr val="0E1726"/>
+                        <a:srgbClr val="FFFFFF"/>
                       </a:solidFill>
                       <a:prstDash val="solid"/>
                       <a:round/>
@@ -5196,7 +4964,7 @@
                     </a:lnT>
                     <a:lnB w="12700" cap="flat" cmpd="sng" algn="ctr">
                       <a:solidFill>
-                        <a:srgbClr val="0E1726"/>
+                        <a:srgbClr val="FFFFFF"/>
                       </a:solidFill>
                       <a:prstDash val="solid"/>
                       <a:round/>
@@ -5204,7 +4972,7 @@
                       <a:tailEnd type="none" w="med" len="med"/>
                     </a:lnB>
                     <a:solidFill>
-                      <a:srgbClr val="1E2B45"/>
+                      <a:srgbClr val="E8EDF3"/>
                     </a:solidFill>
                   </a:tcPr>
                 </a:tc>
@@ -5219,7 +4987,7 @@
                       <a:r>
                         <a:rPr lang="en-US" sz="1200" dirty="0">
                           <a:solidFill>
-                            <a:srgbClr val="E6EDF3"/>
+                            <a:srgbClr val="1F2937"/>
                           </a:solidFill>
                         </a:rPr>
                         <a:t>backdoor planted in liblzma upstream</a:t>
@@ -5230,7 +4998,7 @@
                   <a:tcPr marL="76200" marR="76200" marT="38100" marB="38100" anchor="ctr">
                     <a:lnL w="12700" cap="flat" cmpd="sng" algn="ctr">
                       <a:solidFill>
-                        <a:srgbClr val="0E1726"/>
+                        <a:srgbClr val="FFFFFF"/>
                       </a:solidFill>
                       <a:prstDash val="solid"/>
                       <a:round/>
@@ -5239,7 +5007,7 @@
                     </a:lnL>
                     <a:lnR w="12700" cap="flat" cmpd="sng" algn="ctr">
                       <a:solidFill>
-                        <a:srgbClr val="0E1726"/>
+                        <a:srgbClr val="FFFFFF"/>
                       </a:solidFill>
                       <a:prstDash val="solid"/>
                       <a:round/>
@@ -5248,7 +5016,7 @@
                     </a:lnR>
                     <a:lnT w="12700" cap="flat" cmpd="sng" algn="ctr">
                       <a:solidFill>
-                        <a:srgbClr val="0E1726"/>
+                        <a:srgbClr val="FFFFFF"/>
                       </a:solidFill>
                       <a:prstDash val="solid"/>
                       <a:round/>
@@ -5257,7 +5025,7 @@
                     </a:lnT>
                     <a:lnB w="12700" cap="flat" cmpd="sng" algn="ctr">
                       <a:solidFill>
-                        <a:srgbClr val="0E1726"/>
+                        <a:srgbClr val="FFFFFF"/>
                       </a:solidFill>
                       <a:prstDash val="solid"/>
                       <a:round/>
@@ -5265,7 +5033,7 @@
                       <a:tailEnd type="none" w="med" len="med"/>
                     </a:lnB>
                     <a:solidFill>
-                      <a:srgbClr val="1E2B45"/>
+                      <a:srgbClr val="E8EDF3"/>
                     </a:solidFill>
                   </a:tcPr>
                 </a:tc>
@@ -5282,7 +5050,7 @@
                       <a:r>
                         <a:rPr lang="en-US" sz="1200" dirty="0">
                           <a:solidFill>
-                            <a:srgbClr val="E6EDF3"/>
+                            <a:srgbClr val="1F2937"/>
                           </a:solidFill>
                         </a:rPr>
                         <a:t>CircleCI (2023)</a:t>
@@ -5293,7 +5061,7 @@
                   <a:tcPr marL="76200" marR="76200" marT="38100" marB="38100" anchor="ctr">
                     <a:lnL w="12700" cap="flat" cmpd="sng" algn="ctr">
                       <a:solidFill>
-                        <a:srgbClr val="0E1726"/>
+                        <a:srgbClr val="FFFFFF"/>
                       </a:solidFill>
                       <a:prstDash val="solid"/>
                       <a:round/>
@@ -5302,7 +5070,7 @@
                     </a:lnL>
                     <a:lnR w="12700" cap="flat" cmpd="sng" algn="ctr">
                       <a:solidFill>
-                        <a:srgbClr val="0E1726"/>
+                        <a:srgbClr val="FFFFFF"/>
                       </a:solidFill>
                       <a:prstDash val="solid"/>
                       <a:round/>
@@ -5311,7 +5079,7 @@
                     </a:lnR>
                     <a:lnT w="12700" cap="flat" cmpd="sng" algn="ctr">
                       <a:solidFill>
-                        <a:srgbClr val="0E1726"/>
+                        <a:srgbClr val="FFFFFF"/>
                       </a:solidFill>
                       <a:prstDash val="solid"/>
                       <a:round/>
@@ -5320,7 +5088,7 @@
                     </a:lnT>
                     <a:lnB w="12700" cap="flat" cmpd="sng" algn="ctr">
                       <a:solidFill>
-                        <a:srgbClr val="0E1726"/>
+                        <a:srgbClr val="FFFFFF"/>
                       </a:solidFill>
                       <a:prstDash val="solid"/>
                       <a:round/>
@@ -5328,7 +5096,7 @@
                       <a:tailEnd type="none" w="med" len="med"/>
                     </a:lnB>
                     <a:solidFill>
-                      <a:srgbClr val="18243A"/>
+                      <a:srgbClr val="F1F5F9"/>
                     </a:solidFill>
                   </a:tcPr>
                 </a:tc>
@@ -5343,7 +5111,7 @@
                       <a:r>
                         <a:rPr lang="en-US" sz="1200" dirty="0">
                           <a:solidFill>
-                            <a:srgbClr val="E6EDF3"/>
+                            <a:srgbClr val="1F2937"/>
                           </a:solidFill>
                         </a:rPr>
                         <a:t>stolen CI tokens → customer secrets</a:t>
@@ -5354,7 +5122,7 @@
                   <a:tcPr marL="76200" marR="76200" marT="38100" marB="38100" anchor="ctr">
                     <a:lnL w="12700" cap="flat" cmpd="sng" algn="ctr">
                       <a:solidFill>
-                        <a:srgbClr val="0E1726"/>
+                        <a:srgbClr val="FFFFFF"/>
                       </a:solidFill>
                       <a:prstDash val="solid"/>
                       <a:round/>
@@ -5363,7 +5131,7 @@
                     </a:lnL>
                     <a:lnR w="12700" cap="flat" cmpd="sng" algn="ctr">
                       <a:solidFill>
-                        <a:srgbClr val="0E1726"/>
+                        <a:srgbClr val="FFFFFF"/>
                       </a:solidFill>
                       <a:prstDash val="solid"/>
                       <a:round/>
@@ -5372,7 +5140,7 @@
                     </a:lnR>
                     <a:lnT w="12700" cap="flat" cmpd="sng" algn="ctr">
                       <a:solidFill>
-                        <a:srgbClr val="0E1726"/>
+                        <a:srgbClr val="FFFFFF"/>
                       </a:solidFill>
                       <a:prstDash val="solid"/>
                       <a:round/>
@@ -5381,7 +5149,7 @@
                     </a:lnT>
                     <a:lnB w="12700" cap="flat" cmpd="sng" algn="ctr">
                       <a:solidFill>
-                        <a:srgbClr val="0E1726"/>
+                        <a:srgbClr val="FFFFFF"/>
                       </a:solidFill>
                       <a:prstDash val="solid"/>
                       <a:round/>
@@ -5389,7 +5157,7 @@
                       <a:tailEnd type="none" w="med" len="med"/>
                     </a:lnB>
                     <a:solidFill>
-                      <a:srgbClr val="18243A"/>
+                      <a:srgbClr val="F1F5F9"/>
                     </a:solidFill>
                   </a:tcPr>
                 </a:tc>
@@ -5415,7 +5183,7 @@
             </a:avLst>
           </a:prstGeom>
           <a:solidFill>
-            <a:srgbClr val="1E2B45"/>
+            <a:srgbClr val="E8EDF3"/>
           </a:solidFill>
           <a:ln/>
         </p:spPr>
@@ -5486,7 +5254,7 @@
             <a:r>
               <a:rPr lang="en-US" sz="900" dirty="0">
                 <a:solidFill>
-                  <a:srgbClr val="94A3B8"/>
+                  <a:srgbClr val="64748B"/>
                 </a:solidFill>
                 <a:latin typeface="Calibri" pitchFamily="34" charset="0"/>
                 <a:ea typeface="Calibri" pitchFamily="34" charset="-122"/>
@@ -5498,38 +5266,9 @@
           </a:p>
         </p:txBody>
       </p:sp>
-      <p:sp>
-        <p:nvSpPr>
-          <p:cNvPr id="9" name="Shape 5"/>
-          <p:cNvSpPr/>
-          <p:nvPr/>
-        </p:nvSpPr>
-        <p:spPr>
-          <a:xfrm>
-            <a:off x="7772400" y="4590288"/>
-            <a:ext cx="969264" cy="475488"/>
-          </a:xfrm>
-          <a:prstGeom prst="roundRect">
-            <a:avLst>
-              <a:gd name="adj" fmla="val 11538"/>
-            </a:avLst>
-          </a:prstGeom>
-          <a:solidFill>
-            <a:srgbClr val="FFFFFF"/>
-          </a:solidFill>
-          <a:ln/>
-          <a:effectLst>
-            <a:outerShdw sx="100000" sy="100000" kx="0" ky="0" algn="bl" rotWithShape="0" blurRad="101600" dist="38100" dir="5400000">
-              <a:srgbClr val="000000">
-                <a:alpha val="35000"/>
-              </a:srgbClr>
-            </a:outerShdw>
-          </a:effectLst>
-        </p:spPr>
-      </p:sp>
       <p:pic>
         <p:nvPicPr>
-          <p:cNvPr id="10" name="Image 1" descr="/Users/pop7/Library/CloudStorage/OneDrive-MonsterConnectCo.,Ltd/Lecture/KOSEN69 - software-security/slides/pptx/assets/logo-small.png">    </p:cNvPr>
+          <p:cNvPr id="9" name="Image 1" descr="/Users/pop7/Library/CloudStorage/OneDrive-MonsterConnectCo.,Ltd/Lecture/KOSEN69 - software-security/slides/pptx/assets/logo-small.png">    </p:cNvPr>
           <p:cNvPicPr>
             <a:picLocks noChangeAspect="1"/>
           </p:cNvPicPr>
@@ -5543,7 +5282,7 @@
         </p:blipFill>
         <p:spPr>
           <a:xfrm>
-            <a:off x="7872984" y="4681728"/>
+            <a:off x="7882128" y="4700016"/>
             <a:ext cx="768096" cy="356616"/>
           </a:xfrm>
           <a:prstGeom prst="rect">
@@ -5565,7 +5304,7 @@
     <p:bg>
       <p:bgPr>
         <a:solidFill>
-          <a:srgbClr val="0E1726"/>
+          <a:srgbClr val="FFFFFF"/>
         </a:solidFill>
       </p:bgPr>
     </p:bg>
@@ -5602,9 +5341,9 @@
           </a:solidFill>
           <a:ln/>
           <a:effectLst>
-            <a:outerShdw sx="100000" sy="100000" kx="0" ky="0" algn="bl" rotWithShape="0" blurRad="101600" dist="38100" dir="5400000">
+            <a:outerShdw sx="100000" sy="100000" kx="0" ky="0" algn="bl" rotWithShape="0" blurRad="76200" dist="25400" dir="5400000">
               <a:srgbClr val="000000">
-                <a:alpha val="35000"/>
+                <a:alpha val="12000"/>
               </a:srgbClr>
             </a:outerShdw>
           </a:effectLst>
@@ -5661,7 +5400,7 @@
             <a:r>
               <a:rPr lang="en-US" sz="2600" b="1" dirty="0">
                 <a:solidFill>
-                  <a:srgbClr val="E6EDF3"/>
+                  <a:srgbClr val="1F2937"/>
                 </a:solidFill>
                 <a:latin typeface="Arial" pitchFamily="34" charset="0"/>
                 <a:ea typeface="Arial" pitchFamily="34" charset="-122"/>
@@ -5690,13 +5429,13 @@
             </a:avLst>
           </a:prstGeom>
           <a:solidFill>
-            <a:srgbClr val="18243A"/>
+            <a:srgbClr val="F1F5F9"/>
           </a:solidFill>
           <a:ln/>
           <a:effectLst>
-            <a:outerShdw sx="100000" sy="100000" kx="0" ky="0" algn="bl" rotWithShape="0" blurRad="101600" dist="38100" dir="5400000">
+            <a:outerShdw sx="100000" sy="100000" kx="0" ky="0" algn="bl" rotWithShape="0" blurRad="76200" dist="25400" dir="5400000">
               <a:srgbClr val="000000">
-                <a:alpha val="35000"/>
+                <a:alpha val="12000"/>
               </a:srgbClr>
             </a:outerShdw>
           </a:effectLst>
@@ -5733,7 +5472,7 @@
             <a:r>
               <a:rPr lang="en-US" sz="1400" dirty="0">
                 <a:solidFill>
-                  <a:srgbClr val="E6EDF3"/>
+                  <a:srgbClr val="1F2937"/>
                 </a:solidFill>
                 <a:latin typeface="Calibri" pitchFamily="34" charset="0"/>
                 <a:ea typeface="Calibri" pitchFamily="34" charset="-122"/>
@@ -5754,7 +5493,7 @@
             <a:r>
               <a:rPr lang="en-US" sz="1400" dirty="0">
                 <a:solidFill>
-                  <a:srgbClr val="E6EDF3"/>
+                  <a:srgbClr val="1F2937"/>
                 </a:solidFill>
                 <a:latin typeface="Calibri" pitchFamily="34" charset="0"/>
                 <a:ea typeface="Calibri" pitchFamily="34" charset="-122"/>
@@ -5775,7 +5514,7 @@
             <a:r>
               <a:rPr lang="en-US" sz="1400" dirty="0">
                 <a:solidFill>
-                  <a:srgbClr val="E6EDF3"/>
+                  <a:srgbClr val="1F2937"/>
                 </a:solidFill>
                 <a:latin typeface="Calibri" pitchFamily="34" charset="0"/>
                 <a:ea typeface="Calibri" pitchFamily="34" charset="-122"/>
@@ -5796,7 +5535,7 @@
             <a:r>
               <a:rPr lang="en-US" sz="1400" dirty="0">
                 <a:solidFill>
-                  <a:srgbClr val="E6EDF3"/>
+                  <a:srgbClr val="1F2937"/>
                 </a:solidFill>
                 <a:latin typeface="Calibri" pitchFamily="34" charset="0"/>
                 <a:ea typeface="Calibri" pitchFamily="34" charset="-122"/>
@@ -5835,7 +5574,7 @@
             <a:r>
               <a:rPr lang="en-US" sz="900" dirty="0">
                 <a:solidFill>
-                  <a:srgbClr val="94A3B8"/>
+                  <a:srgbClr val="64748B"/>
                 </a:solidFill>
                 <a:latin typeface="Calibri" pitchFamily="34" charset="0"/>
                 <a:ea typeface="Calibri" pitchFamily="34" charset="-122"/>
@@ -5847,38 +5586,9 @@
           </a:p>
         </p:txBody>
       </p:sp>
-      <p:sp>
-        <p:nvSpPr>
-          <p:cNvPr id="8" name="Shape 5"/>
-          <p:cNvSpPr/>
-          <p:nvPr/>
-        </p:nvSpPr>
-        <p:spPr>
-          <a:xfrm>
-            <a:off x="7772400" y="4590288"/>
-            <a:ext cx="969264" cy="475488"/>
-          </a:xfrm>
-          <a:prstGeom prst="roundRect">
-            <a:avLst>
-              <a:gd name="adj" fmla="val 11538"/>
-            </a:avLst>
-          </a:prstGeom>
-          <a:solidFill>
-            <a:srgbClr val="FFFFFF"/>
-          </a:solidFill>
-          <a:ln/>
-          <a:effectLst>
-            <a:outerShdw sx="100000" sy="100000" kx="0" ky="0" algn="bl" rotWithShape="0" blurRad="101600" dist="38100" dir="5400000">
-              <a:srgbClr val="000000">
-                <a:alpha val="35000"/>
-              </a:srgbClr>
-            </a:outerShdw>
-          </a:effectLst>
-        </p:spPr>
-      </p:sp>
       <p:pic>
         <p:nvPicPr>
-          <p:cNvPr id="9" name="Image 1" descr="/Users/pop7/Library/CloudStorage/OneDrive-MonsterConnectCo.,Ltd/Lecture/KOSEN69 - software-security/slides/pptx/assets/logo-small.png">    </p:cNvPr>
+          <p:cNvPr id="8" name="Image 1" descr="/Users/pop7/Library/CloudStorage/OneDrive-MonsterConnectCo.,Ltd/Lecture/KOSEN69 - software-security/slides/pptx/assets/logo-small.png">    </p:cNvPr>
           <p:cNvPicPr>
             <a:picLocks noChangeAspect="1"/>
           </p:cNvPicPr>
@@ -5892,7 +5602,7 @@
         </p:blipFill>
         <p:spPr>
           <a:xfrm>
-            <a:off x="7872984" y="4681728"/>
+            <a:off x="7882128" y="4700016"/>
             <a:ext cx="768096" cy="356616"/>
           </a:xfrm>
           <a:prstGeom prst="rect">
@@ -5914,7 +5624,7 @@
     <p:bg>
       <p:bgPr>
         <a:solidFill>
-          <a:srgbClr val="0E1726"/>
+          <a:srgbClr val="FFFFFF"/>
         </a:solidFill>
       </p:bgPr>
     </p:bg>
@@ -5951,9 +5661,9 @@
           </a:solidFill>
           <a:ln/>
           <a:effectLst>
-            <a:outerShdw sx="100000" sy="100000" kx="0" ky="0" algn="bl" rotWithShape="0" blurRad="101600" dist="38100" dir="5400000">
+            <a:outerShdw sx="100000" sy="100000" kx="0" ky="0" algn="bl" rotWithShape="0" blurRad="76200" dist="25400" dir="5400000">
               <a:srgbClr val="000000">
-                <a:alpha val="35000"/>
+                <a:alpha val="12000"/>
               </a:srgbClr>
             </a:outerShdw>
           </a:effectLst>
@@ -6010,7 +5720,7 @@
             <a:r>
               <a:rPr lang="en-US" sz="2600" b="1" dirty="0">
                 <a:solidFill>
-                  <a:srgbClr val="E6EDF3"/>
+                  <a:srgbClr val="1F2937"/>
                 </a:solidFill>
                 <a:latin typeface="Arial" pitchFamily="34" charset="0"/>
                 <a:ea typeface="Arial" pitchFamily="34" charset="-122"/>
@@ -6043,7 +5753,7 @@
           </a:solidFill>
           <a:ln w="12700">
             <a:solidFill>
-              <a:srgbClr val="1E2B45"/>
+              <a:srgbClr val="E8EDF3"/>
             </a:solidFill>
             <a:prstDash val="solid"/>
           </a:ln>
@@ -6139,13 +5849,13 @@
             </a:avLst>
           </a:prstGeom>
           <a:solidFill>
-            <a:srgbClr val="18243A"/>
+            <a:srgbClr val="F1F5F9"/>
           </a:solidFill>
           <a:ln/>
           <a:effectLst>
-            <a:outerShdw sx="100000" sy="100000" kx="0" ky="0" algn="bl" rotWithShape="0" blurRad="101600" dist="38100" dir="5400000">
+            <a:outerShdw sx="100000" sy="100000" kx="0" ky="0" algn="bl" rotWithShape="0" blurRad="76200" dist="25400" dir="5400000">
               <a:srgbClr val="000000">
-                <a:alpha val="35000"/>
+                <a:alpha val="12000"/>
               </a:srgbClr>
             </a:outerShdw>
           </a:effectLst>
@@ -6182,7 +5892,7 @@
             <a:r>
               <a:rPr lang="en-US" sz="1400" dirty="0">
                 <a:solidFill>
-                  <a:srgbClr val="E6EDF3"/>
+                  <a:srgbClr val="1F2937"/>
                 </a:solidFill>
                 <a:latin typeface="Calibri" pitchFamily="34" charset="0"/>
                 <a:ea typeface="Calibri" pitchFamily="34" charset="-122"/>
@@ -6203,7 +5913,7 @@
             <a:r>
               <a:rPr lang="en-US" sz="1400" dirty="0">
                 <a:solidFill>
-                  <a:srgbClr val="E6EDF3"/>
+                  <a:srgbClr val="1F2937"/>
                 </a:solidFill>
                 <a:latin typeface="Calibri" pitchFamily="34" charset="0"/>
                 <a:ea typeface="Calibri" pitchFamily="34" charset="-122"/>
@@ -6242,7 +5952,7 @@
             <a:r>
               <a:rPr lang="en-US" sz="900" dirty="0">
                 <a:solidFill>
-                  <a:srgbClr val="94A3B8"/>
+                  <a:srgbClr val="64748B"/>
                 </a:solidFill>
                 <a:latin typeface="Calibri" pitchFamily="34" charset="0"/>
                 <a:ea typeface="Calibri" pitchFamily="34" charset="-122"/>
@@ -6254,38 +5964,9 @@
           </a:p>
         </p:txBody>
       </p:sp>
-      <p:sp>
-        <p:nvSpPr>
-          <p:cNvPr id="10" name="Shape 7"/>
-          <p:cNvSpPr/>
-          <p:nvPr/>
-        </p:nvSpPr>
-        <p:spPr>
-          <a:xfrm>
-            <a:off x="7772400" y="4590288"/>
-            <a:ext cx="969264" cy="475488"/>
-          </a:xfrm>
-          <a:prstGeom prst="roundRect">
-            <a:avLst>
-              <a:gd name="adj" fmla="val 11538"/>
-            </a:avLst>
-          </a:prstGeom>
-          <a:solidFill>
-            <a:srgbClr val="FFFFFF"/>
-          </a:solidFill>
-          <a:ln/>
-          <a:effectLst>
-            <a:outerShdw sx="100000" sy="100000" kx="0" ky="0" algn="bl" rotWithShape="0" blurRad="101600" dist="38100" dir="5400000">
-              <a:srgbClr val="000000">
-                <a:alpha val="35000"/>
-              </a:srgbClr>
-            </a:outerShdw>
-          </a:effectLst>
-        </p:spPr>
-      </p:sp>
       <p:pic>
         <p:nvPicPr>
-          <p:cNvPr id="11" name="Image 1" descr="/Users/pop7/Library/CloudStorage/OneDrive-MonsterConnectCo.,Ltd/Lecture/KOSEN69 - software-security/slides/pptx/assets/logo-small.png">    </p:cNvPr>
+          <p:cNvPr id="10" name="Image 1" descr="/Users/pop7/Library/CloudStorage/OneDrive-MonsterConnectCo.,Ltd/Lecture/KOSEN69 - software-security/slides/pptx/assets/logo-small.png">    </p:cNvPr>
           <p:cNvPicPr>
             <a:picLocks noChangeAspect="1"/>
           </p:cNvPicPr>
@@ -6299,7 +5980,7 @@
         </p:blipFill>
         <p:spPr>
           <a:xfrm>
-            <a:off x="7872984" y="4681728"/>
+            <a:off x="7882128" y="4700016"/>
             <a:ext cx="768096" cy="356616"/>
           </a:xfrm>
           <a:prstGeom prst="rect">
@@ -6321,7 +6002,7 @@
     <p:bg>
       <p:bgPr>
         <a:solidFill>
-          <a:srgbClr val="0E1726"/>
+          <a:srgbClr val="FFFFFF"/>
         </a:solidFill>
       </p:bgPr>
     </p:bg>
@@ -6358,9 +6039,9 @@
           </a:solidFill>
           <a:ln/>
           <a:effectLst>
-            <a:outerShdw sx="100000" sy="100000" kx="0" ky="0" algn="bl" rotWithShape="0" blurRad="101600" dist="38100" dir="5400000">
+            <a:outerShdw sx="100000" sy="100000" kx="0" ky="0" algn="bl" rotWithShape="0" blurRad="76200" dist="25400" dir="5400000">
               <a:srgbClr val="000000">
-                <a:alpha val="35000"/>
+                <a:alpha val="12000"/>
               </a:srgbClr>
             </a:outerShdw>
           </a:effectLst>
@@ -6417,7 +6098,7 @@
             <a:r>
               <a:rPr lang="en-US" sz="2600" b="1" dirty="0">
                 <a:solidFill>
-                  <a:srgbClr val="E6EDF3"/>
+                  <a:srgbClr val="1F2937"/>
                 </a:solidFill>
                 <a:latin typeface="Arial" pitchFamily="34" charset="0"/>
                 <a:ea typeface="Arial" pitchFamily="34" charset="-122"/>
@@ -6446,13 +6127,13 @@
             </a:avLst>
           </a:prstGeom>
           <a:solidFill>
-            <a:srgbClr val="18243A"/>
+            <a:srgbClr val="F1F5F9"/>
           </a:solidFill>
           <a:ln/>
           <a:effectLst>
-            <a:outerShdw sx="100000" sy="100000" kx="0" ky="0" algn="bl" rotWithShape="0" blurRad="101600" dist="38100" dir="5400000">
+            <a:outerShdw sx="100000" sy="100000" kx="0" ky="0" algn="bl" rotWithShape="0" blurRad="76200" dist="25400" dir="5400000">
               <a:srgbClr val="000000">
-                <a:alpha val="35000"/>
+                <a:alpha val="12000"/>
               </a:srgbClr>
             </a:outerShdw>
           </a:effectLst>
@@ -6489,7 +6170,7 @@
             <a:r>
               <a:rPr lang="en-US" sz="1400" dirty="0">
                 <a:solidFill>
-                  <a:srgbClr val="E6EDF3"/>
+                  <a:srgbClr val="1F2937"/>
                 </a:solidFill>
                 <a:latin typeface="Calibri" pitchFamily="34" charset="0"/>
                 <a:ea typeface="Calibri" pitchFamily="34" charset="-122"/>
@@ -6510,7 +6191,7 @@
             <a:r>
               <a:rPr lang="en-US" sz="1400" dirty="0">
                 <a:solidFill>
-                  <a:srgbClr val="E6EDF3"/>
+                  <a:srgbClr val="1F2937"/>
                 </a:solidFill>
                 <a:latin typeface="Calibri" pitchFamily="34" charset="0"/>
                 <a:ea typeface="Calibri" pitchFamily="34" charset="-122"/>
@@ -6531,7 +6212,7 @@
             <a:r>
               <a:rPr lang="en-US" sz="1400" dirty="0">
                 <a:solidFill>
-                  <a:srgbClr val="E6EDF3"/>
+                  <a:srgbClr val="1F2937"/>
                 </a:solidFill>
                 <a:latin typeface="Calibri" pitchFamily="34" charset="0"/>
                 <a:ea typeface="Calibri" pitchFamily="34" charset="-122"/>
@@ -6570,7 +6251,7 @@
             <a:r>
               <a:rPr lang="en-US" sz="900" dirty="0">
                 <a:solidFill>
-                  <a:srgbClr val="94A3B8"/>
+                  <a:srgbClr val="64748B"/>
                 </a:solidFill>
                 <a:latin typeface="Calibri" pitchFamily="34" charset="0"/>
                 <a:ea typeface="Calibri" pitchFamily="34" charset="-122"/>
@@ -6582,38 +6263,9 @@
           </a:p>
         </p:txBody>
       </p:sp>
-      <p:sp>
-        <p:nvSpPr>
-          <p:cNvPr id="8" name="Shape 5"/>
-          <p:cNvSpPr/>
-          <p:nvPr/>
-        </p:nvSpPr>
-        <p:spPr>
-          <a:xfrm>
-            <a:off x="7772400" y="4590288"/>
-            <a:ext cx="969264" cy="475488"/>
-          </a:xfrm>
-          <a:prstGeom prst="roundRect">
-            <a:avLst>
-              <a:gd name="adj" fmla="val 11538"/>
-            </a:avLst>
-          </a:prstGeom>
-          <a:solidFill>
-            <a:srgbClr val="FFFFFF"/>
-          </a:solidFill>
-          <a:ln/>
-          <a:effectLst>
-            <a:outerShdw sx="100000" sy="100000" kx="0" ky="0" algn="bl" rotWithShape="0" blurRad="101600" dist="38100" dir="5400000">
-              <a:srgbClr val="000000">
-                <a:alpha val="35000"/>
-              </a:srgbClr>
-            </a:outerShdw>
-          </a:effectLst>
-        </p:spPr>
-      </p:sp>
       <p:pic>
         <p:nvPicPr>
-          <p:cNvPr id="9" name="Image 1" descr="/Users/pop7/Library/CloudStorage/OneDrive-MonsterConnectCo.,Ltd/Lecture/KOSEN69 - software-security/slides/pptx/assets/logo-small.png">    </p:cNvPr>
+          <p:cNvPr id="8" name="Image 1" descr="/Users/pop7/Library/CloudStorage/OneDrive-MonsterConnectCo.,Ltd/Lecture/KOSEN69 - software-security/slides/pptx/assets/logo-small.png">    </p:cNvPr>
           <p:cNvPicPr>
             <a:picLocks noChangeAspect="1"/>
           </p:cNvPicPr>
@@ -6627,7 +6279,7 @@
         </p:blipFill>
         <p:spPr>
           <a:xfrm>
-            <a:off x="7872984" y="4681728"/>
+            <a:off x="7882128" y="4700016"/>
             <a:ext cx="768096" cy="356616"/>
           </a:xfrm>
           <a:prstGeom prst="rect">
@@ -6649,7 +6301,7 @@
     <p:bg>
       <p:bgPr>
         <a:solidFill>
-          <a:srgbClr val="0E1726"/>
+          <a:srgbClr val="FFFFFF"/>
         </a:solidFill>
       </p:bgPr>
     </p:bg>
@@ -6686,9 +6338,9 @@
           </a:solidFill>
           <a:ln/>
           <a:effectLst>
-            <a:outerShdw sx="100000" sy="100000" kx="0" ky="0" algn="bl" rotWithShape="0" blurRad="101600" dist="38100" dir="5400000">
+            <a:outerShdw sx="100000" sy="100000" kx="0" ky="0" algn="bl" rotWithShape="0" blurRad="76200" dist="25400" dir="5400000">
               <a:srgbClr val="000000">
-                <a:alpha val="35000"/>
+                <a:alpha val="12000"/>
               </a:srgbClr>
             </a:outerShdw>
           </a:effectLst>
@@ -6745,7 +6397,7 @@
             <a:r>
               <a:rPr lang="en-US" sz="2600" b="1" dirty="0">
                 <a:solidFill>
-                  <a:srgbClr val="E6EDF3"/>
+                  <a:srgbClr val="1F2937"/>
                 </a:solidFill>
                 <a:latin typeface="Arial" pitchFamily="34" charset="0"/>
                 <a:ea typeface="Arial" pitchFamily="34" charset="-122"/>
@@ -6778,7 +6430,7 @@
           </a:solidFill>
           <a:ln w="12700">
             <a:solidFill>
-              <a:srgbClr val="1E2B45"/>
+              <a:srgbClr val="E8EDF3"/>
             </a:solidFill>
             <a:prstDash val="solid"/>
           </a:ln>
@@ -6874,13 +6526,13 @@
             </a:avLst>
           </a:prstGeom>
           <a:solidFill>
-            <a:srgbClr val="18243A"/>
+            <a:srgbClr val="F1F5F9"/>
           </a:solidFill>
           <a:ln/>
           <a:effectLst>
-            <a:outerShdw sx="100000" sy="100000" kx="0" ky="0" algn="bl" rotWithShape="0" blurRad="101600" dist="38100" dir="5400000">
+            <a:outerShdw sx="100000" sy="100000" kx="0" ky="0" algn="bl" rotWithShape="0" blurRad="76200" dist="25400" dir="5400000">
               <a:srgbClr val="000000">
-                <a:alpha val="35000"/>
+                <a:alpha val="12000"/>
               </a:srgbClr>
             </a:outerShdw>
           </a:effectLst>
@@ -6917,7 +6569,7 @@
             <a:r>
               <a:rPr lang="en-US" sz="1400" dirty="0">
                 <a:solidFill>
-                  <a:srgbClr val="E6EDF3"/>
+                  <a:srgbClr val="1F2937"/>
                 </a:solidFill>
                 <a:latin typeface="Calibri" pitchFamily="34" charset="0"/>
                 <a:ea typeface="Calibri" pitchFamily="34" charset="-122"/>
@@ -6956,7 +6608,7 @@
             <a:r>
               <a:rPr lang="en-US" sz="900" dirty="0">
                 <a:solidFill>
-                  <a:srgbClr val="94A3B8"/>
+                  <a:srgbClr val="64748B"/>
                 </a:solidFill>
                 <a:latin typeface="Calibri" pitchFamily="34" charset="0"/>
                 <a:ea typeface="Calibri" pitchFamily="34" charset="-122"/>
@@ -6968,38 +6620,9 @@
           </a:p>
         </p:txBody>
       </p:sp>
-      <p:sp>
-        <p:nvSpPr>
-          <p:cNvPr id="10" name="Shape 7"/>
-          <p:cNvSpPr/>
-          <p:nvPr/>
-        </p:nvSpPr>
-        <p:spPr>
-          <a:xfrm>
-            <a:off x="7772400" y="4590288"/>
-            <a:ext cx="969264" cy="475488"/>
-          </a:xfrm>
-          <a:prstGeom prst="roundRect">
-            <a:avLst>
-              <a:gd name="adj" fmla="val 11538"/>
-            </a:avLst>
-          </a:prstGeom>
-          <a:solidFill>
-            <a:srgbClr val="FFFFFF"/>
-          </a:solidFill>
-          <a:ln/>
-          <a:effectLst>
-            <a:outerShdw sx="100000" sy="100000" kx="0" ky="0" algn="bl" rotWithShape="0" blurRad="101600" dist="38100" dir="5400000">
-              <a:srgbClr val="000000">
-                <a:alpha val="35000"/>
-              </a:srgbClr>
-            </a:outerShdw>
-          </a:effectLst>
-        </p:spPr>
-      </p:sp>
       <p:pic>
         <p:nvPicPr>
-          <p:cNvPr id="11" name="Image 1" descr="/Users/pop7/Library/CloudStorage/OneDrive-MonsterConnectCo.,Ltd/Lecture/KOSEN69 - software-security/slides/pptx/assets/logo-small.png">    </p:cNvPr>
+          <p:cNvPr id="10" name="Image 1" descr="/Users/pop7/Library/CloudStorage/OneDrive-MonsterConnectCo.,Ltd/Lecture/KOSEN69 - software-security/slides/pptx/assets/logo-small.png">    </p:cNvPr>
           <p:cNvPicPr>
             <a:picLocks noChangeAspect="1"/>
           </p:cNvPicPr>
@@ -7013,7 +6636,7 @@
         </p:blipFill>
         <p:spPr>
           <a:xfrm>
-            <a:off x="7872984" y="4681728"/>
+            <a:off x="7882128" y="4700016"/>
             <a:ext cx="768096" cy="356616"/>
           </a:xfrm>
           <a:prstGeom prst="rect">
@@ -7035,7 +6658,7 @@
     <p:bg>
       <p:bgPr>
         <a:solidFill>
-          <a:srgbClr val="0E1726"/>
+          <a:srgbClr val="FFFFFF"/>
         </a:solidFill>
       </p:bgPr>
     </p:bg>
@@ -7072,9 +6695,9 @@
           </a:solidFill>
           <a:ln/>
           <a:effectLst>
-            <a:outerShdw sx="100000" sy="100000" kx="0" ky="0" algn="bl" rotWithShape="0" blurRad="101600" dist="38100" dir="5400000">
+            <a:outerShdw sx="100000" sy="100000" kx="0" ky="0" algn="bl" rotWithShape="0" blurRad="76200" dist="25400" dir="5400000">
               <a:srgbClr val="000000">
-                <a:alpha val="35000"/>
+                <a:alpha val="12000"/>
               </a:srgbClr>
             </a:outerShdw>
           </a:effectLst>
@@ -7131,7 +6754,7 @@
             <a:r>
               <a:rPr lang="en-US" sz="2600" b="1" dirty="0">
                 <a:solidFill>
-                  <a:srgbClr val="E6EDF3"/>
+                  <a:srgbClr val="1F2937"/>
                 </a:solidFill>
                 <a:latin typeface="Arial" pitchFamily="34" charset="0"/>
                 <a:ea typeface="Arial" pitchFamily="34" charset="-122"/>
@@ -7160,13 +6783,13 @@
             </a:avLst>
           </a:prstGeom>
           <a:solidFill>
-            <a:srgbClr val="18243A"/>
+            <a:srgbClr val="F1F5F9"/>
           </a:solidFill>
           <a:ln/>
           <a:effectLst>
-            <a:outerShdw sx="100000" sy="100000" kx="0" ky="0" algn="bl" rotWithShape="0" blurRad="101600" dist="38100" dir="5400000">
+            <a:outerShdw sx="100000" sy="100000" kx="0" ky="0" algn="bl" rotWithShape="0" blurRad="76200" dist="25400" dir="5400000">
               <a:srgbClr val="000000">
-                <a:alpha val="35000"/>
+                <a:alpha val="12000"/>
               </a:srgbClr>
             </a:outerShdw>
           </a:effectLst>
@@ -7203,7 +6826,7 @@
             <a:r>
               <a:rPr lang="en-US" sz="1400" dirty="0">
                 <a:solidFill>
-                  <a:srgbClr val="E6EDF3"/>
+                  <a:srgbClr val="1F2937"/>
                 </a:solidFill>
                 <a:latin typeface="Calibri" pitchFamily="34" charset="0"/>
                 <a:ea typeface="Calibri" pitchFamily="34" charset="-122"/>
@@ -7224,7 +6847,7 @@
             <a:r>
               <a:rPr lang="en-US" sz="1400" dirty="0">
                 <a:solidFill>
-                  <a:srgbClr val="E6EDF3"/>
+                  <a:srgbClr val="1F2937"/>
                 </a:solidFill>
                 <a:latin typeface="Calibri" pitchFamily="34" charset="0"/>
                 <a:ea typeface="Calibri" pitchFamily="34" charset="-122"/>
@@ -7245,7 +6868,7 @@
             <a:r>
               <a:rPr lang="en-US" sz="1400" dirty="0">
                 <a:solidFill>
-                  <a:srgbClr val="E6EDF3"/>
+                  <a:srgbClr val="1F2937"/>
                 </a:solidFill>
                 <a:latin typeface="Calibri" pitchFamily="34" charset="0"/>
                 <a:ea typeface="Calibri" pitchFamily="34" charset="-122"/>
@@ -7266,7 +6889,7 @@
             <a:r>
               <a:rPr lang="en-US" sz="1400" dirty="0">
                 <a:solidFill>
-                  <a:srgbClr val="E6EDF3"/>
+                  <a:srgbClr val="1F2937"/>
                 </a:solidFill>
                 <a:latin typeface="Calibri" pitchFamily="34" charset="0"/>
                 <a:ea typeface="Calibri" pitchFamily="34" charset="-122"/>
@@ -7305,7 +6928,7 @@
             <a:r>
               <a:rPr lang="en-US" sz="900" dirty="0">
                 <a:solidFill>
-                  <a:srgbClr val="94A3B8"/>
+                  <a:srgbClr val="64748B"/>
                 </a:solidFill>
                 <a:latin typeface="Calibri" pitchFamily="34" charset="0"/>
                 <a:ea typeface="Calibri" pitchFamily="34" charset="-122"/>
@@ -7317,38 +6940,9 @@
           </a:p>
         </p:txBody>
       </p:sp>
-      <p:sp>
-        <p:nvSpPr>
-          <p:cNvPr id="8" name="Shape 5"/>
-          <p:cNvSpPr/>
-          <p:nvPr/>
-        </p:nvSpPr>
-        <p:spPr>
-          <a:xfrm>
-            <a:off x="7772400" y="4590288"/>
-            <a:ext cx="969264" cy="475488"/>
-          </a:xfrm>
-          <a:prstGeom prst="roundRect">
-            <a:avLst>
-              <a:gd name="adj" fmla="val 11538"/>
-            </a:avLst>
-          </a:prstGeom>
-          <a:solidFill>
-            <a:srgbClr val="FFFFFF"/>
-          </a:solidFill>
-          <a:ln/>
-          <a:effectLst>
-            <a:outerShdw sx="100000" sy="100000" kx="0" ky="0" algn="bl" rotWithShape="0" blurRad="101600" dist="38100" dir="5400000">
-              <a:srgbClr val="000000">
-                <a:alpha val="35000"/>
-              </a:srgbClr>
-            </a:outerShdw>
-          </a:effectLst>
-        </p:spPr>
-      </p:sp>
       <p:pic>
         <p:nvPicPr>
-          <p:cNvPr id="9" name="Image 1" descr="/Users/pop7/Library/CloudStorage/OneDrive-MonsterConnectCo.,Ltd/Lecture/KOSEN69 - software-security/slides/pptx/assets/logo-small.png">    </p:cNvPr>
+          <p:cNvPr id="8" name="Image 1" descr="/Users/pop7/Library/CloudStorage/OneDrive-MonsterConnectCo.,Ltd/Lecture/KOSEN69 - software-security/slides/pptx/assets/logo-small.png">    </p:cNvPr>
           <p:cNvPicPr>
             <a:picLocks noChangeAspect="1"/>
           </p:cNvPicPr>
@@ -7362,7 +6956,7 @@
         </p:blipFill>
         <p:spPr>
           <a:xfrm>
-            <a:off x="7872984" y="4681728"/>
+            <a:off x="7882128" y="4700016"/>
             <a:ext cx="768096" cy="356616"/>
           </a:xfrm>
           <a:prstGeom prst="rect">

--- a/slides/pptx/week12.pptx
+++ b/slides/pptx/week12.pptx
@@ -515,7 +515,7 @@
           <a:p>
             <a:r>
               <a:rPr lang="en-US" dirty="0"/>
-              <a:t/>
+              <a:t>Hook: ask how many lines of code they wrote in their last project vs how many they shipped. The gap is dependencies — and that's the attack surface this week. One poisoned package = thousands of victims. ~2 min.</a:t>
             </a:r>
             <a:endParaRPr lang="en-US" dirty="0"/>
           </a:p>
@@ -603,7 +603,7 @@
           <a:p>
             <a:r>
               <a:rPr lang="en-US" dirty="0"/>
-              <a:t/>
+              <a:t>The payoff checklist. Pin + scope kills dependency confusion; verify-before-deploy kills tampered artifacts; MFA on maintainer/CI accounts kills the xz/CircleCI vector. "Automate in CI" sets up W15. ~4 min.</a:t>
             </a:r>
             <a:endParaRPr lang="en-US" dirty="0"/>
           </a:p>
@@ -691,7 +691,7 @@
           <a:p>
             <a:r>
               <a:rPr lang="en-US" dirty="0"/>
-              <a:t/>
+              <a:t>Explain before lab — all in a controlled local registry (ethics: never publish a real typosquat). Defend side is graded. The SLSA self-assessment makes them reason about their own pipeline. ~3 min.</a:t>
             </a:r>
             <a:endParaRPr lang="en-US" dirty="0"/>
           </a:p>
@@ -779,7 +779,7 @@
           <a:p>
             <a:r>
               <a:rPr lang="en-US" dirty="0"/>
-              <a:t/>
+              <a:t>The SLSA self-assessment is the thinking part — they place their own build on the ladder and justify it. AI-resilient tasks count.</a:t>
             </a:r>
             <a:endParaRPr lang="en-US" dirty="0"/>
           </a:p>
@@ -867,7 +867,7 @@
           <a:p>
             <a:r>
               <a:rPr lang="en-US" dirty="0"/>
-              <a:t/>
+              <a:t>Recap with the three verbs. Cold-call: "the next Log4Shell drops at 2am — what artifact tells you if you're affected?" (the SBOM). ~2 min.</a:t>
             </a:r>
             <a:endParaRPr lang="en-US" dirty="0"/>
           </a:p>
@@ -955,7 +955,7 @@
           <a:p>
             <a:r>
               <a:rPr lang="en-US" dirty="0"/>
-              <a:t/>
+              <a:t>Cliffhanger: "Next week — where your code runs. We'll hunt cloud/container misconfigs, the #1 real-world breach cause."</a:t>
             </a:r>
             <a:endParaRPr lang="en-US" dirty="0"/>
           </a:p>
@@ -1043,7 +1043,7 @@
           <a:p>
             <a:r>
               <a:rPr lang="en-US" dirty="0"/>
-              <a:t/>
+              <a:t>Roadmap, 1 min. Three verbs to remember all week: KNOW your ingredients (SBOM), PROVE your build (SLSA), SIGN your artifacts (Cosign).</a:t>
             </a:r>
             <a:endParaRPr lang="en-US" dirty="0"/>
           </a:p>
@@ -1131,7 +1131,7 @@
           <a:p>
             <a:r>
               <a:rPr lang="en-US" dirty="0"/>
-              <a:t/>
+              <a:t>New in OWASP 2025 — promoted to A03, reflecting reality. The 10/90 ratio shocks students. You can write perfect code and still be owned through a dependency you never read. ~4 min.</a:t>
             </a:r>
             <a:endParaRPr lang="en-US" dirty="0"/>
           </a:p>
@@ -1219,7 +1219,7 @@
           <a:p>
             <a:r>
               <a:rPr lang="en-US" dirty="0"/>
-              <a:t/>
+              <a:t>Spend time on xz (2024): a patient attacker became a trusted maintainer over years, then planted a backdoor caught only by luck (a 0.5s SSH delay). The lesson: trust in maintainers is itself attackable. ~5 min.</a:t>
             </a:r>
             <a:endParaRPr lang="en-US" dirty="0"/>
           </a:p>
@@ -1307,7 +1307,7 @@
           <a:p>
             <a:r>
               <a:rPr lang="en-US" dirty="0"/>
-              <a:t/>
+              <a:t>Define dependency confusion clearly (it's the game): if your internal pkg "acme-utils" isn't scoped, a public "acme-utils" with a higher version number can get pulled instead. Transitive = you vet your 10 deps, but they pull 800 you never saw. ~5 min.</a:t>
             </a:r>
             <a:endParaRPr lang="en-US" dirty="0"/>
           </a:p>
@@ -1395,7 +1395,7 @@
           <a:p>
             <a:r>
               <a:rPr lang="en-US" dirty="0"/>
-              <a:t/>
+              <a:t>Hands-on tooling (ties to W2 SCA). Run trivy live on the project — it lists CVEs + the fixed version. Q6 of the quiz asks for one real vulnerable dependency they found + remediation. ~4 min.</a:t>
             </a:r>
             <a:endParaRPr lang="en-US" dirty="0"/>
           </a:p>
@@ -1483,7 +1483,7 @@
           <a:p>
             <a:r>
               <a:rPr lang="en-US" dirty="0"/>
-              <a:t/>
+              <a:t>SBOM = the food-label analogy: you can't manage what you can't list. When the next Log4Shell drops, an SBOM answers "are we affected?" in seconds. SLSA = levels (1-4) of how tamper-resistant your build pipeline is. ~5 min.</a:t>
             </a:r>
             <a:endParaRPr lang="en-US" dirty="0"/>
           </a:p>
@@ -1571,7 +1571,7 @@
           <a:p>
             <a:r>
               <a:rPr lang="en-US" dirty="0"/>
-              <a:t/>
+              <a:t>Demo the sign→verify loop. Keyless (Sigstore) = identity-based signing via OIDC, no key to leak. The deploy gate: refuse any image that doesn't verify → a tampered artifact can't ship. This is the lab's defend step. ~4 min.</a:t>
             </a:r>
             <a:endParaRPr lang="en-US" dirty="0"/>
           </a:p>
@@ -1659,7 +1659,7 @@
           <a:p>
             <a:r>
               <a:rPr lang="en-US" dirty="0"/>
-              <a:t/>
+              <a:t>The managed option students will meet in industry. Dependabot is the practical supply-chain workhorse: it opens PRs bumping vulnerable deps automatically. Push protection stops secrets at commit time (recall W2). ~3 min.</a:t>
             </a:r>
             <a:endParaRPr lang="en-US" dirty="0"/>
           </a:p>
@@ -3029,11 +3029,11 @@
         <p:spPr>
           <a:xfrm>
             <a:off x="457200" y="1325880"/>
-            <a:ext cx="8229600" cy="1207008"/>
+            <a:ext cx="8229600" cy="1517904"/>
           </a:xfrm>
           <a:prstGeom prst="roundRect">
             <a:avLst>
-              <a:gd name="adj" fmla="val 6061"/>
+              <a:gd name="adj" fmla="val 4819"/>
             </a:avLst>
           </a:prstGeom>
           <a:solidFill>
@@ -3058,7 +3058,7 @@
         <p:spPr>
           <a:xfrm>
             <a:off x="731520" y="1435608"/>
-            <a:ext cx="7680960" cy="987552"/>
+            <a:ext cx="7680960" cy="1298448"/>
           </a:xfrm>
           <a:prstGeom prst="rect">
             <a:avLst/>
@@ -3129,6 +3129,27 @@
                 <a:cs typeface="Calibri" pitchFamily="34" charset="-120"/>
               </a:rPr>
               <a:t>One-paragraph SLSA self-assessment (which level + why)</a:t>
+            </a:r>
+            <a:endParaRPr lang="en-US" sz="1400" dirty="0"/>
+          </a:p>
+          <a:p>
+            <a:pPr marL="342900" indent="-342900">
+              <a:spcAft>
+                <a:spcPts val="600"/>
+              </a:spcAft>
+              <a:buSzPct val="100000"/>
+              <a:buChar char="•"/>
+            </a:pPr>
+            <a:r>
+              <a:rPr lang="en-US" sz="1400" dirty="0">
+                <a:solidFill>
+                  <a:srgbClr val="1F2937"/>
+                </a:solidFill>
+                <a:latin typeface="Calibri" pitchFamily="34" charset="0"/>
+                <a:ea typeface="Calibri" pitchFamily="34" charset="-122"/>
+                <a:cs typeface="Calibri" pitchFamily="34" charset="-120"/>
+              </a:rPr>
+              <a:t>+ Audit the AI / EiPE / Prompt Problem (see worksheet)</a:t>
             </a:r>
             <a:endParaRPr lang="en-US" sz="1400" dirty="0"/>
           </a:p>

--- a/slides/pptx/week12.pptx
+++ b/slides/pptx/week12.pptx
@@ -3029,6 +3029,67 @@
         <p:spPr>
           <a:xfrm>
             <a:off x="457200" y="1325880"/>
+            <a:ext cx="8229600" cy="822960"/>
+          </a:xfrm>
+          <a:prstGeom prst="roundRect">
+            <a:avLst>
+              <a:gd name="adj" fmla="val 8889"/>
+            </a:avLst>
+          </a:prstGeom>
+          <a:solidFill>
+            <a:srgbClr val="E8EDF3"/>
+          </a:solidFill>
+          <a:ln/>
+        </p:spPr>
+      </p:sp>
+      <p:sp>
+        <p:nvSpPr>
+          <p:cNvPr id="6" name="Text 3"/>
+          <p:cNvSpPr/>
+          <p:nvPr/>
+        </p:nvSpPr>
+        <p:spPr>
+          <a:xfrm>
+            <a:off x="731520" y="1325880"/>
+            <a:ext cx="7680960" cy="822960"/>
+          </a:xfrm>
+          <a:prstGeom prst="rect">
+            <a:avLst/>
+          </a:prstGeom>
+          <a:noFill/>
+          <a:ln/>
+        </p:spPr>
+        <p:txBody>
+          <a:bodyPr wrap="square" lIns="0" tIns="0" rIns="0" bIns="0" rtlCol="0" anchor="ctr"/>
+          <a:lstStyle/>
+          <a:p>
+            <a:pPr indent="0" marL="0">
+              <a:buNone/>
+            </a:pPr>
+            <a:r>
+              <a:rPr lang="en-US" sz="1400" i="1" dirty="0">
+                <a:solidFill>
+                  <a:srgbClr val="E35205"/>
+                </a:solidFill>
+                <a:latin typeface="Calibri" pitchFamily="34" charset="0"/>
+                <a:ea typeface="Calibri" pitchFamily="34" charset="-122"/>
+                <a:cs typeface="Calibri" pitchFamily="34" charset="-120"/>
+              </a:rPr>
+              <a:t>📋 Worksheet 12 — labs/week12-supply-chain/worksheet.md (Part 3) · kickoff: bash sca_scan.sh (trivy fs + pip-audit)</a:t>
+            </a:r>
+            <a:endParaRPr lang="en-US" sz="1400" dirty="0"/>
+          </a:p>
+        </p:txBody>
+      </p:sp>
+      <p:sp>
+        <p:nvSpPr>
+          <p:cNvPr id="7" name="Shape 4"/>
+          <p:cNvSpPr/>
+          <p:nvPr/>
+        </p:nvSpPr>
+        <p:spPr>
+          <a:xfrm>
+            <a:off x="457200" y="2313432"/>
             <a:ext cx="8229600" cy="1517904"/>
           </a:xfrm>
           <a:prstGeom prst="roundRect">
@@ -3051,13 +3112,13 @@
       </p:sp>
       <p:sp>
         <p:nvSpPr>
-          <p:cNvPr id="6" name="Text 3"/>
-          <p:cNvSpPr/>
-          <p:nvPr/>
-        </p:nvSpPr>
-        <p:spPr>
-          <a:xfrm>
-            <a:off x="731520" y="1435608"/>
+          <p:cNvPr id="8" name="Text 5"/>
+          <p:cNvSpPr/>
+          <p:nvPr/>
+        </p:nvSpPr>
+        <p:spPr>
+          <a:xfrm>
+            <a:off x="731520" y="2423160"/>
             <a:ext cx="7680960" cy="1298448"/>
           </a:xfrm>
           <a:prstGeom prst="rect">
@@ -3157,7 +3218,7 @@
       </p:sp>
       <p:sp>
         <p:nvSpPr>
-          <p:cNvPr id="7" name="Text 4"/>
+          <p:cNvPr id="9" name="Text 6"/>
           <p:cNvSpPr/>
           <p:nvPr/>
         </p:nvSpPr>
@@ -3196,7 +3257,7 @@
       </p:sp>
       <p:pic>
         <p:nvPicPr>
-          <p:cNvPr id="8" name="Image 1" descr="/Users/pop7/Library/CloudStorage/OneDrive-MonsterConnectCo.,Ltd/Lecture/KOSEN69 - software-security/slides/pptx/assets/logo-small.png">    </p:cNvPr>
+          <p:cNvPr id="10" name="Image 1" descr="/Users/pop7/Library/CloudStorage/OneDrive-MonsterConnectCo.,Ltd/Lecture/KOSEN69 - software-security/slides/pptx/assets/logo-small.png">    </p:cNvPr>
           <p:cNvPicPr>
             <a:picLocks noChangeAspect="1"/>
           </p:cNvPicPr>
